--- a/China/CT/MIR lens designation.pptx
+++ b/China/CT/MIR lens designation.pptx
@@ -7,6 +7,11 @@
   <p:sldIdLst>
     <p:sldId id="256" r:id="rId5"/>
     <p:sldId id="257" r:id="rId6"/>
+    <p:sldId id="258" r:id="rId7"/>
+    <p:sldId id="259" r:id="rId8"/>
+    <p:sldId id="260" r:id="rId9"/>
+    <p:sldId id="261" r:id="rId10"/>
+    <p:sldId id="262" r:id="rId11"/>
   </p:sldIdLst>
   <p:sldSz cx="12192000" cy="6858000"/>
   <p:notesSz cx="6858000" cy="9144000"/>
@@ -105,6 +110,11 @@
       </a:defRPr>
     </a:lvl9pPr>
   </p:defaultTextStyle>
+  <p:extLst>
+    <p:ext uri="{EFAFB233-063F-42B5-8137-9DF3F51BA10A}">
+      <p15:sldGuideLst xmlns:p15="http://schemas.microsoft.com/office/powerpoint/2012/main"/>
+    </p:ext>
+  </p:extLst>
 </p:presentation>
 </file>
 
@@ -255,7 +265,7 @@
           <a:p>
             <a:fld id="{478A1D79-AC11-42D2-8624-BCB47AB1B642}" type="datetimeFigureOut">
               <a:rPr lang="en-US" smtClean="0"/>
-              <a:t>3/15/2026</a:t>
+              <a:t>8/17/2026</a:t>
             </a:fld>
             <a:endParaRPr lang="en-US"/>
           </a:p>
@@ -453,7 +463,7 @@
           <a:p>
             <a:fld id="{478A1D79-AC11-42D2-8624-BCB47AB1B642}" type="datetimeFigureOut">
               <a:rPr lang="en-US" smtClean="0"/>
-              <a:t>3/15/2026</a:t>
+              <a:t>8/17/2026</a:t>
             </a:fld>
             <a:endParaRPr lang="en-US"/>
           </a:p>
@@ -661,7 +671,7 @@
           <a:p>
             <a:fld id="{478A1D79-AC11-42D2-8624-BCB47AB1B642}" type="datetimeFigureOut">
               <a:rPr lang="en-US" smtClean="0"/>
-              <a:t>3/15/2026</a:t>
+              <a:t>8/17/2026</a:t>
             </a:fld>
             <a:endParaRPr lang="en-US"/>
           </a:p>
@@ -859,7 +869,7 @@
           <a:p>
             <a:fld id="{478A1D79-AC11-42D2-8624-BCB47AB1B642}" type="datetimeFigureOut">
               <a:rPr lang="en-US" smtClean="0"/>
-              <a:t>3/15/2026</a:t>
+              <a:t>8/17/2026</a:t>
             </a:fld>
             <a:endParaRPr lang="en-US"/>
           </a:p>
@@ -1134,7 +1144,7 @@
           <a:p>
             <a:fld id="{478A1D79-AC11-42D2-8624-BCB47AB1B642}" type="datetimeFigureOut">
               <a:rPr lang="en-US" smtClean="0"/>
-              <a:t>3/15/2026</a:t>
+              <a:t>8/17/2026</a:t>
             </a:fld>
             <a:endParaRPr lang="en-US"/>
           </a:p>
@@ -1399,7 +1409,7 @@
           <a:p>
             <a:fld id="{478A1D79-AC11-42D2-8624-BCB47AB1B642}" type="datetimeFigureOut">
               <a:rPr lang="en-US" smtClean="0"/>
-              <a:t>3/15/2026</a:t>
+              <a:t>8/17/2026</a:t>
             </a:fld>
             <a:endParaRPr lang="en-US"/>
           </a:p>
@@ -1811,7 +1821,7 @@
           <a:p>
             <a:fld id="{478A1D79-AC11-42D2-8624-BCB47AB1B642}" type="datetimeFigureOut">
               <a:rPr lang="en-US" smtClean="0"/>
-              <a:t>3/15/2026</a:t>
+              <a:t>8/17/2026</a:t>
             </a:fld>
             <a:endParaRPr lang="en-US"/>
           </a:p>
@@ -1952,7 +1962,7 @@
           <a:p>
             <a:fld id="{478A1D79-AC11-42D2-8624-BCB47AB1B642}" type="datetimeFigureOut">
               <a:rPr lang="en-US" smtClean="0"/>
-              <a:t>3/15/2026</a:t>
+              <a:t>8/17/2026</a:t>
             </a:fld>
             <a:endParaRPr lang="en-US"/>
           </a:p>
@@ -2065,7 +2075,7 @@
           <a:p>
             <a:fld id="{478A1D79-AC11-42D2-8624-BCB47AB1B642}" type="datetimeFigureOut">
               <a:rPr lang="en-US" smtClean="0"/>
-              <a:t>3/15/2026</a:t>
+              <a:t>8/17/2026</a:t>
             </a:fld>
             <a:endParaRPr lang="en-US"/>
           </a:p>
@@ -2376,7 +2386,7 @@
           <a:p>
             <a:fld id="{478A1D79-AC11-42D2-8624-BCB47AB1B642}" type="datetimeFigureOut">
               <a:rPr lang="en-US" smtClean="0"/>
-              <a:t>3/15/2026</a:t>
+              <a:t>8/17/2026</a:t>
             </a:fld>
             <a:endParaRPr lang="en-US"/>
           </a:p>
@@ -2664,7 +2674,7 @@
           <a:p>
             <a:fld id="{478A1D79-AC11-42D2-8624-BCB47AB1B642}" type="datetimeFigureOut">
               <a:rPr lang="en-US" smtClean="0"/>
-              <a:t>3/15/2026</a:t>
+              <a:t>8/17/2026</a:t>
             </a:fld>
             <a:endParaRPr lang="en-US"/>
           </a:p>
@@ -2905,7 +2915,7 @@
           <a:p>
             <a:fld id="{478A1D79-AC11-42D2-8624-BCB47AB1B642}" type="datetimeFigureOut">
               <a:rPr lang="en-US" smtClean="0"/>
-              <a:t>3/15/2026</a:t>
+              <a:t>8/17/2026</a:t>
             </a:fld>
             <a:endParaRPr lang="en-US"/>
           </a:p>
@@ -4371,6 +4381,2830 @@
 </p:sld>
 </file>
 
+<file path=ppt/slides/slide3.xml><?xml version="1.0" encoding="utf-8"?>
+<p:sld xmlns:a="http://schemas.openxmlformats.org/drawingml/2006/main" xmlns:r="http://schemas.openxmlformats.org/officeDocument/2006/relationships" xmlns:p="http://schemas.openxmlformats.org/presentationml/2006/main">
+  <p:cSld>
+    <p:spTree>
+      <p:nvGrpSpPr>
+        <p:cNvPr id="1" name=""/>
+        <p:cNvGrpSpPr/>
+        <p:nvPr/>
+      </p:nvGrpSpPr>
+      <p:grpSpPr>
+        <a:xfrm>
+          <a:off x="0" y="0"/>
+          <a:ext cx="0" cy="0"/>
+          <a:chOff x="0" y="0"/>
+          <a:chExt cx="0" cy="0"/>
+        </a:xfrm>
+      </p:grpSpPr>
+      <p:grpSp>
+        <p:nvGrpSpPr>
+          <p:cNvPr id="22" name="组合 21">
+            <a:extLst>
+              <a:ext uri="{FF2B5EF4-FFF2-40B4-BE49-F238E27FC236}">
+                <a16:creationId xmlns:a16="http://schemas.microsoft.com/office/drawing/2014/main" id="{9F136529-D70D-759F-D5BD-9D19DCF4D72C}"/>
+              </a:ext>
+            </a:extLst>
+          </p:cNvPr>
+          <p:cNvGrpSpPr/>
+          <p:nvPr/>
+        </p:nvGrpSpPr>
+        <p:grpSpPr>
+          <a:xfrm>
+            <a:off x="761915" y="0"/>
+            <a:ext cx="6765170" cy="2455248"/>
+            <a:chOff x="947650" y="607990"/>
+            <a:chExt cx="6765170" cy="2455248"/>
+          </a:xfrm>
+        </p:grpSpPr>
+        <p:grpSp>
+          <p:nvGrpSpPr>
+            <p:cNvPr id="8" name="组合 7">
+              <a:extLst>
+                <a:ext uri="{FF2B5EF4-FFF2-40B4-BE49-F238E27FC236}">
+                  <a16:creationId xmlns:a16="http://schemas.microsoft.com/office/drawing/2014/main" id="{20A21DFB-BE03-C20A-431B-E6A4CA6EA9AA}"/>
+                </a:ext>
+              </a:extLst>
+            </p:cNvPr>
+            <p:cNvGrpSpPr/>
+            <p:nvPr/>
+          </p:nvGrpSpPr>
+          <p:grpSpPr>
+            <a:xfrm>
+              <a:off x="1163780" y="1069655"/>
+              <a:ext cx="6549040" cy="1993583"/>
+              <a:chOff x="1163780" y="1069655"/>
+              <a:chExt cx="6549040" cy="1993583"/>
+            </a:xfrm>
+          </p:grpSpPr>
+          <p:grpSp>
+            <p:nvGrpSpPr>
+              <p:cNvPr id="4" name="组合 3">
+                <a:extLst>
+                  <a:ext uri="{FF2B5EF4-FFF2-40B4-BE49-F238E27FC236}">
+                    <a16:creationId xmlns:a16="http://schemas.microsoft.com/office/drawing/2014/main" id="{A230BAF4-2096-D11E-E307-FD9C6C855DF0}"/>
+                  </a:ext>
+                </a:extLst>
+              </p:cNvPr>
+              <p:cNvGrpSpPr/>
+              <p:nvPr/>
+            </p:nvGrpSpPr>
+            <p:grpSpPr>
+              <a:xfrm>
+                <a:off x="1163780" y="1069655"/>
+                <a:ext cx="6549040" cy="1993583"/>
+                <a:chOff x="2784762" y="1260848"/>
+                <a:chExt cx="6549040" cy="1993583"/>
+              </a:xfrm>
+            </p:grpSpPr>
+            <p:pic>
+              <p:nvPicPr>
+                <p:cNvPr id="2" name="Picture 13">
+                  <a:extLst>
+                    <a:ext uri="{FF2B5EF4-FFF2-40B4-BE49-F238E27FC236}">
+                      <a16:creationId xmlns:a16="http://schemas.microsoft.com/office/drawing/2014/main" id="{9201924D-D21E-C73A-F67F-131CA5ABBD66}"/>
+                    </a:ext>
+                  </a:extLst>
+                </p:cNvPr>
+                <p:cNvPicPr>
+                  <a:picLocks noChangeAspect="1"/>
+                </p:cNvPicPr>
+                <p:nvPr/>
+              </p:nvPicPr>
+              <p:blipFill>
+                <a:blip r:embed="rId2"/>
+                <a:srcRect b="50000"/>
+                <a:stretch>
+                  <a:fillRect/>
+                </a:stretch>
+              </p:blipFill>
+              <p:spPr>
+                <a:xfrm>
+                  <a:off x="2784762" y="1260848"/>
+                  <a:ext cx="5943600" cy="1993583"/>
+                </a:xfrm>
+                <a:prstGeom prst="rect">
+                  <a:avLst/>
+                </a:prstGeom>
+              </p:spPr>
+            </p:pic>
+            <p:sp>
+              <p:nvSpPr>
+                <p:cNvPr id="3" name="文本框 2">
+                  <a:extLst>
+                    <a:ext uri="{FF2B5EF4-FFF2-40B4-BE49-F238E27FC236}">
+                      <a16:creationId xmlns:a16="http://schemas.microsoft.com/office/drawing/2014/main" id="{78E9D0AE-BB5B-DFB3-1E78-F20B7E2C07E8}"/>
+                    </a:ext>
+                  </a:extLst>
+                </p:cNvPr>
+                <p:cNvSpPr txBox="1"/>
+                <p:nvPr/>
+              </p:nvSpPr>
+              <p:spPr>
+                <a:xfrm>
+                  <a:off x="8314106" y="2500415"/>
+                  <a:ext cx="1019696" cy="307777"/>
+                </a:xfrm>
+                <a:prstGeom prst="rect">
+                  <a:avLst/>
+                </a:prstGeom>
+                <a:solidFill>
+                  <a:schemeClr val="bg1"/>
+                </a:solidFill>
+              </p:spPr>
+              <p:txBody>
+                <a:bodyPr wrap="square" rtlCol="0">
+                  <a:spAutoFit/>
+                </a:bodyPr>
+                <a:lstStyle/>
+                <a:p>
+                  <a:r>
+                    <a:rPr lang="en-US" altLang="zh-CN" sz="1400" dirty="0"/>
+                    <a:t>=2100mm</a:t>
+                  </a:r>
+                  <a:endParaRPr lang="zh-CN" altLang="en-US" sz="1400" dirty="0"/>
+                </a:p>
+              </p:txBody>
+            </p:sp>
+            <p:sp>
+              <p:nvSpPr>
+                <p:cNvPr id="9" name="文本框 8">
+                  <a:extLst>
+                    <a:ext uri="{FF2B5EF4-FFF2-40B4-BE49-F238E27FC236}">
+                      <a16:creationId xmlns:a16="http://schemas.microsoft.com/office/drawing/2014/main" id="{C6BFF92F-81CB-5F75-0E31-169E7915D766}"/>
+                    </a:ext>
+                  </a:extLst>
+                </p:cNvPr>
+                <p:cNvSpPr txBox="1"/>
+                <p:nvPr/>
+              </p:nvSpPr>
+              <p:spPr>
+                <a:xfrm>
+                  <a:off x="7099067" y="2479534"/>
+                  <a:ext cx="1019696" cy="307777"/>
+                </a:xfrm>
+                <a:prstGeom prst="rect">
+                  <a:avLst/>
+                </a:prstGeom>
+                <a:noFill/>
+              </p:spPr>
+              <p:txBody>
+                <a:bodyPr wrap="square" rtlCol="0">
+                  <a:spAutoFit/>
+                </a:bodyPr>
+                <a:lstStyle/>
+                <a:p>
+                  <a:r>
+                    <a:rPr lang="en-US" altLang="zh-CN" sz="1400" dirty="0"/>
+                    <a:t>=1550mm</a:t>
+                  </a:r>
+                  <a:endParaRPr lang="zh-CN" altLang="en-US" sz="1400" dirty="0"/>
+                </a:p>
+              </p:txBody>
+            </p:sp>
+          </p:grpSp>
+          <p:sp>
+            <p:nvSpPr>
+              <p:cNvPr id="7" name="矩形 6">
+                <a:extLst>
+                  <a:ext uri="{FF2B5EF4-FFF2-40B4-BE49-F238E27FC236}">
+                    <a16:creationId xmlns:a16="http://schemas.microsoft.com/office/drawing/2014/main" id="{D829263F-D41D-8C3E-84B7-21C8FBFED729}"/>
+                  </a:ext>
+                </a:extLst>
+              </p:cNvPr>
+              <p:cNvSpPr/>
+              <p:nvPr/>
+            </p:nvSpPr>
+            <p:spPr>
+              <a:xfrm>
+                <a:off x="6087683" y="2818013"/>
+                <a:ext cx="1019697" cy="245225"/>
+              </a:xfrm>
+              <a:prstGeom prst="rect">
+                <a:avLst/>
+              </a:prstGeom>
+              <a:solidFill>
+                <a:schemeClr val="bg1"/>
+              </a:solidFill>
+              <a:ln>
+                <a:noFill/>
+              </a:ln>
+            </p:spPr>
+            <p:style>
+              <a:lnRef idx="2">
+                <a:schemeClr val="accent1">
+                  <a:shade val="15000"/>
+                </a:schemeClr>
+              </a:lnRef>
+              <a:fillRef idx="1">
+                <a:schemeClr val="accent1"/>
+              </a:fillRef>
+              <a:effectRef idx="0">
+                <a:schemeClr val="accent1"/>
+              </a:effectRef>
+              <a:fontRef idx="minor">
+                <a:schemeClr val="lt1"/>
+              </a:fontRef>
+            </p:style>
+            <p:txBody>
+              <a:bodyPr rtlCol="0" anchor="ctr"/>
+              <a:lstStyle/>
+              <a:p>
+                <a:pPr algn="ctr"/>
+                <a:endParaRPr lang="zh-CN" altLang="en-US"/>
+              </a:p>
+            </p:txBody>
+          </p:sp>
+        </p:grpSp>
+        <p:cxnSp>
+          <p:nvCxnSpPr>
+            <p:cNvPr id="13" name="直接箭头连接符 12">
+              <a:extLst>
+                <a:ext uri="{FF2B5EF4-FFF2-40B4-BE49-F238E27FC236}">
+                  <a16:creationId xmlns:a16="http://schemas.microsoft.com/office/drawing/2014/main" id="{EA6968B7-B4AA-2369-2AA5-4655AA39C67F}"/>
+                </a:ext>
+              </a:extLst>
+            </p:cNvPr>
+            <p:cNvCxnSpPr>
+              <a:cxnSpLocks/>
+            </p:cNvCxnSpPr>
+            <p:nvPr/>
+          </p:nvCxnSpPr>
+          <p:spPr>
+            <a:xfrm>
+              <a:off x="947650" y="2087326"/>
+              <a:ext cx="6226234" cy="0"/>
+            </a:xfrm>
+            <a:prstGeom prst="straightConnector1">
+              <a:avLst/>
+            </a:prstGeom>
+            <a:ln>
+              <a:solidFill>
+                <a:schemeClr val="tx1"/>
+              </a:solidFill>
+              <a:tailEnd type="triangle"/>
+            </a:ln>
+          </p:spPr>
+          <p:style>
+            <a:lnRef idx="2">
+              <a:schemeClr val="accent1"/>
+            </a:lnRef>
+            <a:fillRef idx="0">
+              <a:schemeClr val="accent1"/>
+            </a:fillRef>
+            <a:effectRef idx="1">
+              <a:schemeClr val="accent1"/>
+            </a:effectRef>
+            <a:fontRef idx="minor">
+              <a:schemeClr val="tx1"/>
+            </a:fontRef>
+          </p:style>
+        </p:cxnSp>
+        <p:cxnSp>
+          <p:nvCxnSpPr>
+            <p:cNvPr id="15" name="直接箭头连接符 14">
+              <a:extLst>
+                <a:ext uri="{FF2B5EF4-FFF2-40B4-BE49-F238E27FC236}">
+                  <a16:creationId xmlns:a16="http://schemas.microsoft.com/office/drawing/2014/main" id="{F0E29B16-E6D5-9610-CA1D-7872C6626D70}"/>
+                </a:ext>
+              </a:extLst>
+            </p:cNvPr>
+            <p:cNvCxnSpPr>
+              <a:cxnSpLocks/>
+            </p:cNvCxnSpPr>
+            <p:nvPr/>
+          </p:nvCxnSpPr>
+          <p:spPr>
+            <a:xfrm flipV="1">
+              <a:off x="3857106" y="748146"/>
+              <a:ext cx="0" cy="2315092"/>
+            </a:xfrm>
+            <a:prstGeom prst="straightConnector1">
+              <a:avLst/>
+            </a:prstGeom>
+            <a:ln>
+              <a:solidFill>
+                <a:schemeClr val="tx1"/>
+              </a:solidFill>
+              <a:tailEnd type="triangle"/>
+            </a:ln>
+          </p:spPr>
+          <p:style>
+            <a:lnRef idx="2">
+              <a:schemeClr val="accent1"/>
+            </a:lnRef>
+            <a:fillRef idx="0">
+              <a:schemeClr val="accent1"/>
+            </a:fillRef>
+            <a:effectRef idx="1">
+              <a:schemeClr val="accent1"/>
+            </a:effectRef>
+            <a:fontRef idx="minor">
+              <a:schemeClr val="tx1"/>
+            </a:fontRef>
+          </p:style>
+        </p:cxnSp>
+        <p:sp>
+          <p:nvSpPr>
+            <p:cNvPr id="19" name="文本框 18">
+              <a:extLst>
+                <a:ext uri="{FF2B5EF4-FFF2-40B4-BE49-F238E27FC236}">
+                  <a16:creationId xmlns:a16="http://schemas.microsoft.com/office/drawing/2014/main" id="{EF4BAFF2-2644-C1F8-798B-58CCF1E0DFE0}"/>
+                </a:ext>
+              </a:extLst>
+            </p:cNvPr>
+            <p:cNvSpPr txBox="1"/>
+            <p:nvPr/>
+          </p:nvSpPr>
+          <p:spPr>
+            <a:xfrm>
+              <a:off x="7173884" y="1902660"/>
+              <a:ext cx="465513" cy="369332"/>
+            </a:xfrm>
+            <a:prstGeom prst="rect">
+              <a:avLst/>
+            </a:prstGeom>
+            <a:noFill/>
+          </p:spPr>
+          <p:txBody>
+            <a:bodyPr wrap="square" rtlCol="0">
+              <a:spAutoFit/>
+            </a:bodyPr>
+            <a:lstStyle/>
+            <a:p>
+              <a:r>
+                <a:rPr lang="en-US" altLang="zh-CN" dirty="0"/>
+                <a:t>X</a:t>
+              </a:r>
+              <a:endParaRPr lang="zh-CN" altLang="en-US" dirty="0"/>
+            </a:p>
+          </p:txBody>
+        </p:sp>
+        <p:sp>
+          <p:nvSpPr>
+            <p:cNvPr id="21" name="文本框 20">
+              <a:extLst>
+                <a:ext uri="{FF2B5EF4-FFF2-40B4-BE49-F238E27FC236}">
+                  <a16:creationId xmlns:a16="http://schemas.microsoft.com/office/drawing/2014/main" id="{2AC3E4C9-FF36-5184-7E97-5D9F983C20CE}"/>
+                </a:ext>
+              </a:extLst>
+            </p:cNvPr>
+            <p:cNvSpPr txBox="1"/>
+            <p:nvPr/>
+          </p:nvSpPr>
+          <p:spPr>
+            <a:xfrm>
+              <a:off x="3969326" y="607990"/>
+              <a:ext cx="465513" cy="369332"/>
+            </a:xfrm>
+            <a:prstGeom prst="rect">
+              <a:avLst/>
+            </a:prstGeom>
+            <a:noFill/>
+          </p:spPr>
+          <p:txBody>
+            <a:bodyPr wrap="square" rtlCol="0">
+              <a:spAutoFit/>
+            </a:bodyPr>
+            <a:lstStyle/>
+            <a:p>
+              <a:r>
+                <a:rPr lang="en-US" altLang="zh-CN" dirty="0"/>
+                <a:t>Y</a:t>
+              </a:r>
+              <a:endParaRPr lang="zh-CN" altLang="en-US" dirty="0"/>
+            </a:p>
+          </p:txBody>
+        </p:sp>
+      </p:grpSp>
+    </p:spTree>
+    <p:extLst>
+      <p:ext uri="{BB962C8B-B14F-4D97-AF65-F5344CB8AC3E}">
+        <p14:creationId xmlns:p14="http://schemas.microsoft.com/office/powerpoint/2010/main" val="3173861555"/>
+      </p:ext>
+    </p:extLst>
+  </p:cSld>
+  <p:clrMapOvr>
+    <a:masterClrMapping/>
+  </p:clrMapOvr>
+</p:sld>
+</file>
+
+<file path=ppt/slides/slide4.xml><?xml version="1.0" encoding="utf-8"?>
+<p:sld xmlns:a="http://schemas.openxmlformats.org/drawingml/2006/main" xmlns:r="http://schemas.openxmlformats.org/officeDocument/2006/relationships" xmlns:p="http://schemas.openxmlformats.org/presentationml/2006/main">
+  <p:cSld>
+    <p:spTree>
+      <p:nvGrpSpPr>
+        <p:cNvPr id="1" name=""/>
+        <p:cNvGrpSpPr/>
+        <p:nvPr/>
+      </p:nvGrpSpPr>
+      <p:grpSpPr>
+        <a:xfrm>
+          <a:off x="0" y="0"/>
+          <a:ext cx="0" cy="0"/>
+          <a:chOff x="0" y="0"/>
+          <a:chExt cx="0" cy="0"/>
+        </a:xfrm>
+      </p:grpSpPr>
+      <p:grpSp>
+        <p:nvGrpSpPr>
+          <p:cNvPr id="49" name="组合 48">
+            <a:extLst>
+              <a:ext uri="{FF2B5EF4-FFF2-40B4-BE49-F238E27FC236}">
+                <a16:creationId xmlns:a16="http://schemas.microsoft.com/office/drawing/2014/main" id="{A149B0D2-2CD1-0334-84E4-E24679360AE7}"/>
+              </a:ext>
+            </a:extLst>
+          </p:cNvPr>
+          <p:cNvGrpSpPr/>
+          <p:nvPr/>
+        </p:nvGrpSpPr>
+        <p:grpSpPr>
+          <a:xfrm>
+            <a:off x="1089440" y="594791"/>
+            <a:ext cx="10013120" cy="2982598"/>
+            <a:chOff x="1089440" y="594791"/>
+            <a:chExt cx="10013120" cy="2982598"/>
+          </a:xfrm>
+        </p:grpSpPr>
+        <p:grpSp>
+          <p:nvGrpSpPr>
+            <p:cNvPr id="12" name="组合 11">
+              <a:extLst>
+                <a:ext uri="{FF2B5EF4-FFF2-40B4-BE49-F238E27FC236}">
+                  <a16:creationId xmlns:a16="http://schemas.microsoft.com/office/drawing/2014/main" id="{2A86F5E8-C951-DF82-38FB-BF6203024ABB}"/>
+                </a:ext>
+              </a:extLst>
+            </p:cNvPr>
+            <p:cNvGrpSpPr/>
+            <p:nvPr/>
+          </p:nvGrpSpPr>
+          <p:grpSpPr>
+            <a:xfrm>
+              <a:off x="1089440" y="688145"/>
+              <a:ext cx="10013120" cy="2104065"/>
+              <a:chOff x="1089440" y="688145"/>
+              <a:chExt cx="10013120" cy="2104065"/>
+            </a:xfrm>
+          </p:grpSpPr>
+          <p:grpSp>
+            <p:nvGrpSpPr>
+              <p:cNvPr id="33" name="组合 32">
+                <a:extLst>
+                  <a:ext uri="{FF2B5EF4-FFF2-40B4-BE49-F238E27FC236}">
+                    <a16:creationId xmlns:a16="http://schemas.microsoft.com/office/drawing/2014/main" id="{C55846BE-9999-28A7-6A48-D6AF83ACC85B}"/>
+                  </a:ext>
+                </a:extLst>
+              </p:cNvPr>
+              <p:cNvGrpSpPr/>
+              <p:nvPr/>
+            </p:nvGrpSpPr>
+            <p:grpSpPr>
+              <a:xfrm>
+                <a:off x="1089440" y="688145"/>
+                <a:ext cx="10013120" cy="2104065"/>
+                <a:chOff x="1089440" y="688145"/>
+                <a:chExt cx="10013120" cy="2104065"/>
+              </a:xfrm>
+            </p:grpSpPr>
+            <p:grpSp>
+              <p:nvGrpSpPr>
+                <p:cNvPr id="27" name="组合 26">
+                  <a:extLst>
+                    <a:ext uri="{FF2B5EF4-FFF2-40B4-BE49-F238E27FC236}">
+                      <a16:creationId xmlns:a16="http://schemas.microsoft.com/office/drawing/2014/main" id="{1CD194FD-E17F-4227-71CC-86C046F57C71}"/>
+                    </a:ext>
+                  </a:extLst>
+                </p:cNvPr>
+                <p:cNvGrpSpPr/>
+                <p:nvPr/>
+              </p:nvGrpSpPr>
+              <p:grpSpPr>
+                <a:xfrm>
+                  <a:off x="1089440" y="688145"/>
+                  <a:ext cx="10013120" cy="1993583"/>
+                  <a:chOff x="1531505" y="1907345"/>
+                  <a:chExt cx="10013120" cy="1993583"/>
+                </a:xfrm>
+              </p:grpSpPr>
+              <p:grpSp>
+                <p:nvGrpSpPr>
+                  <p:cNvPr id="7" name="组合 6">
+                    <a:extLst>
+                      <a:ext uri="{FF2B5EF4-FFF2-40B4-BE49-F238E27FC236}">
+                        <a16:creationId xmlns:a16="http://schemas.microsoft.com/office/drawing/2014/main" id="{D91F6E45-9727-5125-4FDA-3FE91E7317A7}"/>
+                      </a:ext>
+                    </a:extLst>
+                  </p:cNvPr>
+                  <p:cNvGrpSpPr/>
+                  <p:nvPr/>
+                </p:nvGrpSpPr>
+                <p:grpSpPr>
+                  <a:xfrm>
+                    <a:off x="5601025" y="1907345"/>
+                    <a:ext cx="5943600" cy="1993583"/>
+                    <a:chOff x="1305094" y="1310725"/>
+                    <a:chExt cx="5943600" cy="1993583"/>
+                  </a:xfrm>
+                </p:grpSpPr>
+                <p:pic>
+                  <p:nvPicPr>
+                    <p:cNvPr id="3" name="Picture 13">
+                      <a:extLst>
+                        <a:ext uri="{FF2B5EF4-FFF2-40B4-BE49-F238E27FC236}">
+                          <a16:creationId xmlns:a16="http://schemas.microsoft.com/office/drawing/2014/main" id="{9FCB1989-B7F5-1018-C5AD-7B04E8800301}"/>
+                        </a:ext>
+                      </a:extLst>
+                    </p:cNvPr>
+                    <p:cNvPicPr>
+                      <a:picLocks noChangeAspect="1"/>
+                    </p:cNvPicPr>
+                    <p:nvPr/>
+                  </p:nvPicPr>
+                  <p:blipFill>
+                    <a:blip r:embed="rId2"/>
+                    <a:srcRect b="50000"/>
+                    <a:stretch>
+                      <a:fillRect/>
+                    </a:stretch>
+                  </p:blipFill>
+                  <p:spPr>
+                    <a:xfrm>
+                      <a:off x="1305094" y="1310725"/>
+                      <a:ext cx="5943600" cy="1993583"/>
+                    </a:xfrm>
+                    <a:prstGeom prst="rect">
+                      <a:avLst/>
+                    </a:prstGeom>
+                  </p:spPr>
+                </p:pic>
+                <mc:AlternateContent xmlns:mc="http://schemas.openxmlformats.org/markup-compatibility/2006" xmlns:a14="http://schemas.microsoft.com/office/drawing/2010/main">
+                  <mc:Choice Requires="a14">
+                    <p:sp>
+                      <p:nvSpPr>
+                        <p:cNvPr id="5" name="文本框 4">
+                          <a:extLst>
+                            <a:ext uri="{FF2B5EF4-FFF2-40B4-BE49-F238E27FC236}">
+                              <a16:creationId xmlns:a16="http://schemas.microsoft.com/office/drawing/2014/main" id="{7EBF3984-FEC9-E747-0780-C5F15B155F18}"/>
+                            </a:ext>
+                          </a:extLst>
+                        </p:cNvPr>
+                        <p:cNvSpPr txBox="1"/>
+                        <p:nvPr/>
+                      </p:nvSpPr>
+                      <p:spPr>
+                        <a:xfrm>
+                          <a:off x="4862944" y="1938184"/>
+                          <a:ext cx="806335" cy="369332"/>
+                        </a:xfrm>
+                        <a:prstGeom prst="rect">
+                          <a:avLst/>
+                        </a:prstGeom>
+                        <a:noFill/>
+                      </p:spPr>
+                      <p:txBody>
+                        <a:bodyPr wrap="square" rtlCol="0">
+                          <a:spAutoFit/>
+                        </a:bodyPr>
+                        <a:lstStyle/>
+                        <a:p>
+                          <a:pPr/>
+                          <a14:m>
+                            <m:oMathPara xmlns:m="http://schemas.openxmlformats.org/officeDocument/2006/math">
+                              <m:oMath>
+                                <m:r>
+                                  <m:rPr>
+                                    <m:sty m:val="p"/>
+                                  </m:rPr>
+                                  <a:rPr lang="en-US" altLang="zh-CN" b="0" i="0" smtClean="0">
+                                    <a:latin typeface="Cambria Math" panose="02040503050406030204" pitchFamily="18" charset="0"/>
+                                  </a:rPr>
+                                  <m:t>tan</m:t>
+                                </m:r>
+                                <m:r>
+                                  <a:rPr lang="en-US" altLang="zh-CN" b="0" i="1" smtClean="0">
+                                    <a:latin typeface="Cambria Math" panose="02040503050406030204" pitchFamily="18" charset="0"/>
+                                  </a:rPr>
+                                  <m:t>⁡(</m:t>
+                                </m:r>
+                                <m:sSub>
+                                  <m:sSubPr>
+                                    <m:ctrlPr>
+                                      <a:rPr lang="en-US" altLang="zh-CN" b="0" i="1" smtClean="0">
+                                        <a:latin typeface="Cambria Math" panose="02040503050406030204" pitchFamily="18" charset="0"/>
+                                      </a:rPr>
+                                    </m:ctrlPr>
+                                  </m:sSubPr>
+                                  <m:e>
+                                    <m:r>
+                                      <a:rPr lang="en-US" altLang="zh-CN" b="0" i="1" smtClean="0">
+                                        <a:latin typeface="Cambria Math" panose="02040503050406030204" pitchFamily="18" charset="0"/>
+                                      </a:rPr>
+                                      <m:t>𝜃</m:t>
+                                    </m:r>
+                                  </m:e>
+                                  <m:sub>
+                                    <m:r>
+                                      <a:rPr lang="en-US" altLang="zh-CN" b="0" i="1" smtClean="0">
+                                        <a:latin typeface="Cambria Math" panose="02040503050406030204" pitchFamily="18" charset="0"/>
+                                      </a:rPr>
+                                      <m:t>𝑖</m:t>
+                                    </m:r>
+                                  </m:sub>
+                                </m:sSub>
+                                <m:r>
+                                  <a:rPr lang="en-US" altLang="zh-CN" b="0" i="1" smtClean="0">
+                                    <a:latin typeface="Cambria Math" panose="02040503050406030204" pitchFamily="18" charset="0"/>
+                                  </a:rPr>
+                                  <m:t>)</m:t>
+                                </m:r>
+                              </m:oMath>
+                            </m:oMathPara>
+                          </a14:m>
+                          <a:endParaRPr lang="zh-CN" altLang="en-US" dirty="0"/>
+                        </a:p>
+                      </p:txBody>
+                    </p:sp>
+                  </mc:Choice>
+                  <mc:Fallback xmlns="">
+                    <p:sp>
+                      <p:nvSpPr>
+                        <p:cNvPr id="5" name="文本框 4">
+                          <a:extLst>
+                            <a:ext uri="{FF2B5EF4-FFF2-40B4-BE49-F238E27FC236}">
+                              <a16:creationId xmlns:a16="http://schemas.microsoft.com/office/drawing/2014/main" id="{7EBF3984-FEC9-E747-0780-C5F15B155F18}"/>
+                            </a:ext>
+                          </a:extLst>
+                        </p:cNvPr>
+                        <p:cNvSpPr txBox="1">
+                          <a:spLocks noRot="1" noChangeAspect="1" noMove="1" noResize="1" noEditPoints="1" noAdjustHandles="1" noChangeArrowheads="1" noChangeShapeType="1" noTextEdit="1"/>
+                        </p:cNvSpPr>
+                        <p:nvPr/>
+                      </p:nvSpPr>
+                      <p:spPr>
+                        <a:xfrm>
+                          <a:off x="4862944" y="1938184"/>
+                          <a:ext cx="806335" cy="369332"/>
+                        </a:xfrm>
+                        <a:prstGeom prst="rect">
+                          <a:avLst/>
+                        </a:prstGeom>
+                        <a:blipFill>
+                          <a:blip r:embed="rId3"/>
+                          <a:stretch>
+                            <a:fillRect r="-12879" b="-13333"/>
+                          </a:stretch>
+                        </a:blipFill>
+                      </p:spPr>
+                      <p:txBody>
+                        <a:bodyPr/>
+                        <a:lstStyle/>
+                        <a:p>
+                          <a:r>
+                            <a:rPr lang="zh-CN" altLang="en-US">
+                              <a:noFill/>
+                            </a:rPr>
+                            <a:t> </a:t>
+                          </a:r>
+                        </a:p>
+                      </p:txBody>
+                    </p:sp>
+                  </mc:Fallback>
+                </mc:AlternateContent>
+                <mc:AlternateContent xmlns:mc="http://schemas.openxmlformats.org/markup-compatibility/2006" xmlns:a14="http://schemas.microsoft.com/office/drawing/2010/main">
+                  <mc:Choice Requires="a14">
+                    <p:sp>
+                      <p:nvSpPr>
+                        <p:cNvPr id="6" name="文本框 5">
+                          <a:extLst>
+                            <a:ext uri="{FF2B5EF4-FFF2-40B4-BE49-F238E27FC236}">
+                              <a16:creationId xmlns:a16="http://schemas.microsoft.com/office/drawing/2014/main" id="{A6309E24-62DC-AF17-F473-251C125D2F2D}"/>
+                            </a:ext>
+                          </a:extLst>
+                        </p:cNvPr>
+                        <p:cNvSpPr txBox="1"/>
+                        <p:nvPr/>
+                      </p:nvSpPr>
+                      <p:spPr>
+                        <a:xfrm>
+                          <a:off x="2589412" y="1938184"/>
+                          <a:ext cx="806335" cy="369332"/>
+                        </a:xfrm>
+                        <a:prstGeom prst="rect">
+                          <a:avLst/>
+                        </a:prstGeom>
+                        <a:noFill/>
+                      </p:spPr>
+                      <p:txBody>
+                        <a:bodyPr wrap="square" rtlCol="0">
+                          <a:spAutoFit/>
+                        </a:bodyPr>
+                        <a:lstStyle/>
+                        <a:p>
+                          <a:pPr/>
+                          <a14:m>
+                            <m:oMathPara xmlns:m="http://schemas.openxmlformats.org/officeDocument/2006/math">
+                              <m:oMath>
+                                <m:r>
+                                  <m:rPr>
+                                    <m:sty m:val="p"/>
+                                  </m:rPr>
+                                  <a:rPr lang="en-US" altLang="zh-CN" b="0" i="0" smtClean="0">
+                                    <a:latin typeface="Cambria Math" panose="02040503050406030204" pitchFamily="18" charset="0"/>
+                                  </a:rPr>
+                                  <m:t>tan</m:t>
+                                </m:r>
+                                <m:r>
+                                  <a:rPr lang="en-US" altLang="zh-CN" b="0" i="1" smtClean="0">
+                                    <a:latin typeface="Cambria Math" panose="02040503050406030204" pitchFamily="18" charset="0"/>
+                                  </a:rPr>
+                                  <m:t>⁡(</m:t>
+                                </m:r>
+                                <m:sSub>
+                                  <m:sSubPr>
+                                    <m:ctrlPr>
+                                      <a:rPr lang="en-US" altLang="zh-CN" b="0" i="1" smtClean="0">
+                                        <a:latin typeface="Cambria Math" panose="02040503050406030204" pitchFamily="18" charset="0"/>
+                                      </a:rPr>
+                                    </m:ctrlPr>
+                                  </m:sSubPr>
+                                  <m:e>
+                                    <m:r>
+                                      <a:rPr lang="en-US" altLang="zh-CN" b="0" i="1" smtClean="0">
+                                        <a:latin typeface="Cambria Math" panose="02040503050406030204" pitchFamily="18" charset="0"/>
+                                      </a:rPr>
+                                      <m:t>𝜃</m:t>
+                                    </m:r>
+                                  </m:e>
+                                  <m:sub>
+                                    <m:r>
+                                      <a:rPr lang="en-US" altLang="zh-CN" b="0" i="1" smtClean="0">
+                                        <a:latin typeface="Cambria Math" panose="02040503050406030204" pitchFamily="18" charset="0"/>
+                                      </a:rPr>
+                                      <m:t>0</m:t>
+                                    </m:r>
+                                  </m:sub>
+                                </m:sSub>
+                                <m:r>
+                                  <a:rPr lang="en-US" altLang="zh-CN" b="0" i="1" smtClean="0">
+                                    <a:latin typeface="Cambria Math" panose="02040503050406030204" pitchFamily="18" charset="0"/>
+                                  </a:rPr>
+                                  <m:t>)</m:t>
+                                </m:r>
+                              </m:oMath>
+                            </m:oMathPara>
+                          </a14:m>
+                          <a:endParaRPr lang="zh-CN" altLang="en-US" dirty="0"/>
+                        </a:p>
+                      </p:txBody>
+                    </p:sp>
+                  </mc:Choice>
+                  <mc:Fallback xmlns="">
+                    <p:sp>
+                      <p:nvSpPr>
+                        <p:cNvPr id="6" name="文本框 5">
+                          <a:extLst>
+                            <a:ext uri="{FF2B5EF4-FFF2-40B4-BE49-F238E27FC236}">
+                              <a16:creationId xmlns:a16="http://schemas.microsoft.com/office/drawing/2014/main" id="{A6309E24-62DC-AF17-F473-251C125D2F2D}"/>
+                            </a:ext>
+                          </a:extLst>
+                        </p:cNvPr>
+                        <p:cNvSpPr txBox="1">
+                          <a:spLocks noRot="1" noChangeAspect="1" noMove="1" noResize="1" noEditPoints="1" noAdjustHandles="1" noChangeArrowheads="1" noChangeShapeType="1" noTextEdit="1"/>
+                        </p:cNvSpPr>
+                        <p:nvPr/>
+                      </p:nvSpPr>
+                      <p:spPr>
+                        <a:xfrm>
+                          <a:off x="2589412" y="1938184"/>
+                          <a:ext cx="806335" cy="369332"/>
+                        </a:xfrm>
+                        <a:prstGeom prst="rect">
+                          <a:avLst/>
+                        </a:prstGeom>
+                        <a:blipFill>
+                          <a:blip r:embed="rId4"/>
+                          <a:stretch>
+                            <a:fillRect r="-16667" b="-13333"/>
+                          </a:stretch>
+                        </a:blipFill>
+                      </p:spPr>
+                      <p:txBody>
+                        <a:bodyPr/>
+                        <a:lstStyle/>
+                        <a:p>
+                          <a:r>
+                            <a:rPr lang="zh-CN" altLang="en-US">
+                              <a:noFill/>
+                            </a:rPr>
+                            <a:t> </a:t>
+                          </a:r>
+                        </a:p>
+                      </p:txBody>
+                    </p:sp>
+                  </mc:Fallback>
+                </mc:AlternateContent>
+              </p:grpSp>
+              <p:sp>
+                <p:nvSpPr>
+                  <p:cNvPr id="8" name="椭圆 7">
+                    <a:extLst>
+                      <a:ext uri="{FF2B5EF4-FFF2-40B4-BE49-F238E27FC236}">
+                        <a16:creationId xmlns:a16="http://schemas.microsoft.com/office/drawing/2014/main" id="{6CB7DF76-4E06-2D04-2B89-13600D327530}"/>
+                      </a:ext>
+                    </a:extLst>
+                  </p:cNvPr>
+                  <p:cNvSpPr/>
+                  <p:nvPr/>
+                </p:nvSpPr>
+                <p:spPr>
+                  <a:xfrm>
+                    <a:off x="4578669" y="2426368"/>
+                    <a:ext cx="192505" cy="1002632"/>
+                  </a:xfrm>
+                  <a:prstGeom prst="ellipse">
+                    <a:avLst/>
+                  </a:prstGeom>
+                </p:spPr>
+                <p:style>
+                  <a:lnRef idx="2">
+                    <a:schemeClr val="accent1">
+                      <a:shade val="15000"/>
+                    </a:schemeClr>
+                  </a:lnRef>
+                  <a:fillRef idx="1">
+                    <a:schemeClr val="accent1"/>
+                  </a:fillRef>
+                  <a:effectRef idx="0">
+                    <a:schemeClr val="accent1"/>
+                  </a:effectRef>
+                  <a:fontRef idx="minor">
+                    <a:schemeClr val="lt1"/>
+                  </a:fontRef>
+                </p:style>
+                <p:txBody>
+                  <a:bodyPr rtlCol="0" anchor="ctr"/>
+                  <a:lstStyle/>
+                  <a:p>
+                    <a:pPr algn="ctr"/>
+                    <a:endParaRPr lang="zh-CN" altLang="en-US"/>
+                  </a:p>
+                </p:txBody>
+              </p:sp>
+              <p:sp>
+                <p:nvSpPr>
+                  <p:cNvPr id="9" name="椭圆 8">
+                    <a:extLst>
+                      <a:ext uri="{FF2B5EF4-FFF2-40B4-BE49-F238E27FC236}">
+                        <a16:creationId xmlns:a16="http://schemas.microsoft.com/office/drawing/2014/main" id="{29209EC8-6312-BCE4-5B7C-6F482BB89893}"/>
+                      </a:ext>
+                    </a:extLst>
+                  </p:cNvPr>
+                  <p:cNvSpPr/>
+                  <p:nvPr/>
+                </p:nvSpPr>
+                <p:spPr>
+                  <a:xfrm>
+                    <a:off x="3407121" y="2360967"/>
+                    <a:ext cx="192505" cy="1086338"/>
+                  </a:xfrm>
+                  <a:prstGeom prst="ellipse">
+                    <a:avLst/>
+                  </a:prstGeom>
+                </p:spPr>
+                <p:style>
+                  <a:lnRef idx="2">
+                    <a:schemeClr val="accent1">
+                      <a:shade val="15000"/>
+                    </a:schemeClr>
+                  </a:lnRef>
+                  <a:fillRef idx="1">
+                    <a:schemeClr val="accent1"/>
+                  </a:fillRef>
+                  <a:effectRef idx="0">
+                    <a:schemeClr val="accent1"/>
+                  </a:effectRef>
+                  <a:fontRef idx="minor">
+                    <a:schemeClr val="lt1"/>
+                  </a:fontRef>
+                </p:style>
+                <p:txBody>
+                  <a:bodyPr rtlCol="0" anchor="ctr"/>
+                  <a:lstStyle/>
+                  <a:p>
+                    <a:pPr algn="ctr"/>
+                    <a:endParaRPr lang="zh-CN" altLang="en-US"/>
+                  </a:p>
+                </p:txBody>
+              </p:sp>
+              <p:cxnSp>
+                <p:nvCxnSpPr>
+                  <p:cNvPr id="11" name="直接连接符 10">
+                    <a:extLst>
+                      <a:ext uri="{FF2B5EF4-FFF2-40B4-BE49-F238E27FC236}">
+                        <a16:creationId xmlns:a16="http://schemas.microsoft.com/office/drawing/2014/main" id="{3E5995EC-6C80-CCB8-C354-F60DD95C2A9B}"/>
+                      </a:ext>
+                    </a:extLst>
+                  </p:cNvPr>
+                  <p:cNvCxnSpPr>
+                    <a:cxnSpLocks/>
+                  </p:cNvCxnSpPr>
+                  <p:nvPr/>
+                </p:nvCxnSpPr>
+                <p:spPr>
+                  <a:xfrm flipH="1">
+                    <a:off x="4771174" y="2360967"/>
+                    <a:ext cx="3289984" cy="759222"/>
+                  </a:xfrm>
+                  <a:prstGeom prst="line">
+                    <a:avLst/>
+                  </a:prstGeom>
+                  <a:ln>
+                    <a:solidFill>
+                      <a:srgbClr val="F0A47D"/>
+                    </a:solidFill>
+                  </a:ln>
+                </p:spPr>
+                <p:style>
+                  <a:lnRef idx="2">
+                    <a:schemeClr val="accent1"/>
+                  </a:lnRef>
+                  <a:fillRef idx="0">
+                    <a:schemeClr val="accent1"/>
+                  </a:fillRef>
+                  <a:effectRef idx="1">
+                    <a:schemeClr val="accent1"/>
+                  </a:effectRef>
+                  <a:fontRef idx="minor">
+                    <a:schemeClr val="tx1"/>
+                  </a:fontRef>
+                </p:style>
+              </p:cxnSp>
+              <p:cxnSp>
+                <p:nvCxnSpPr>
+                  <p:cNvPr id="16" name="直接连接符 15">
+                    <a:extLst>
+                      <a:ext uri="{FF2B5EF4-FFF2-40B4-BE49-F238E27FC236}">
+                        <a16:creationId xmlns:a16="http://schemas.microsoft.com/office/drawing/2014/main" id="{5231BCD9-B3CA-21C1-1634-2645805729D6}"/>
+                      </a:ext>
+                    </a:extLst>
+                  </p:cNvPr>
+                  <p:cNvCxnSpPr>
+                    <a:cxnSpLocks/>
+                  </p:cNvCxnSpPr>
+                  <p:nvPr/>
+                </p:nvCxnSpPr>
+                <p:spPr>
+                  <a:xfrm flipH="1" flipV="1">
+                    <a:off x="4771174" y="2704125"/>
+                    <a:ext cx="3289984" cy="759222"/>
+                  </a:xfrm>
+                  <a:prstGeom prst="line">
+                    <a:avLst/>
+                  </a:prstGeom>
+                  <a:ln>
+                    <a:solidFill>
+                      <a:srgbClr val="F0A47D"/>
+                    </a:solidFill>
+                  </a:ln>
+                </p:spPr>
+                <p:style>
+                  <a:lnRef idx="2">
+                    <a:schemeClr val="accent1"/>
+                  </a:lnRef>
+                  <a:fillRef idx="0">
+                    <a:schemeClr val="accent1"/>
+                  </a:fillRef>
+                  <a:effectRef idx="1">
+                    <a:schemeClr val="accent1"/>
+                  </a:effectRef>
+                  <a:fontRef idx="minor">
+                    <a:schemeClr val="tx1"/>
+                  </a:fontRef>
+                </p:style>
+              </p:cxnSp>
+              <p:cxnSp>
+                <p:nvCxnSpPr>
+                  <p:cNvPr id="17" name="直接连接符 16">
+                    <a:extLst>
+                      <a:ext uri="{FF2B5EF4-FFF2-40B4-BE49-F238E27FC236}">
+                        <a16:creationId xmlns:a16="http://schemas.microsoft.com/office/drawing/2014/main" id="{A28EE1B0-AFA5-065E-D4D3-BF8D26458D19}"/>
+                      </a:ext>
+                    </a:extLst>
+                  </p:cNvPr>
+                  <p:cNvCxnSpPr>
+                    <a:cxnSpLocks/>
+                    <a:endCxn id="9" idx="7"/>
+                  </p:cNvCxnSpPr>
+                  <p:nvPr/>
+                </p:nvCxnSpPr>
+                <p:spPr>
+                  <a:xfrm flipH="1" flipV="1">
+                    <a:off x="3571434" y="2520058"/>
+                    <a:ext cx="1007235" cy="102826"/>
+                  </a:xfrm>
+                  <a:prstGeom prst="line">
+                    <a:avLst/>
+                  </a:prstGeom>
+                  <a:ln>
+                    <a:solidFill>
+                      <a:srgbClr val="F0A47D"/>
+                    </a:solidFill>
+                  </a:ln>
+                </p:spPr>
+                <p:style>
+                  <a:lnRef idx="2">
+                    <a:schemeClr val="accent1"/>
+                  </a:lnRef>
+                  <a:fillRef idx="0">
+                    <a:schemeClr val="accent1"/>
+                  </a:fillRef>
+                  <a:effectRef idx="1">
+                    <a:schemeClr val="accent1"/>
+                  </a:effectRef>
+                  <a:fontRef idx="minor">
+                    <a:schemeClr val="tx1"/>
+                  </a:fontRef>
+                </p:style>
+              </p:cxnSp>
+              <p:cxnSp>
+                <p:nvCxnSpPr>
+                  <p:cNvPr id="21" name="直接连接符 20">
+                    <a:extLst>
+                      <a:ext uri="{FF2B5EF4-FFF2-40B4-BE49-F238E27FC236}">
+                        <a16:creationId xmlns:a16="http://schemas.microsoft.com/office/drawing/2014/main" id="{8282C752-2FCF-4D8C-2A86-FB301316A728}"/>
+                      </a:ext>
+                    </a:extLst>
+                  </p:cNvPr>
+                  <p:cNvCxnSpPr>
+                    <a:cxnSpLocks/>
+                  </p:cNvCxnSpPr>
+                  <p:nvPr/>
+                </p:nvCxnSpPr>
+                <p:spPr>
+                  <a:xfrm flipH="1">
+                    <a:off x="3593090" y="3217889"/>
+                    <a:ext cx="1007235" cy="102826"/>
+                  </a:xfrm>
+                  <a:prstGeom prst="line">
+                    <a:avLst/>
+                  </a:prstGeom>
+                  <a:ln>
+                    <a:solidFill>
+                      <a:srgbClr val="F0A47D"/>
+                    </a:solidFill>
+                  </a:ln>
+                </p:spPr>
+                <p:style>
+                  <a:lnRef idx="2">
+                    <a:schemeClr val="accent1"/>
+                  </a:lnRef>
+                  <a:fillRef idx="0">
+                    <a:schemeClr val="accent1"/>
+                  </a:fillRef>
+                  <a:effectRef idx="1">
+                    <a:schemeClr val="accent1"/>
+                  </a:effectRef>
+                  <a:fontRef idx="minor">
+                    <a:schemeClr val="tx1"/>
+                  </a:fontRef>
+                </p:style>
+              </p:cxnSp>
+              <p:cxnSp>
+                <p:nvCxnSpPr>
+                  <p:cNvPr id="22" name="直接连接符 21">
+                    <a:extLst>
+                      <a:ext uri="{FF2B5EF4-FFF2-40B4-BE49-F238E27FC236}">
+                        <a16:creationId xmlns:a16="http://schemas.microsoft.com/office/drawing/2014/main" id="{E1FC7E36-4126-AC37-470F-F9AD93B3482D}"/>
+                      </a:ext>
+                    </a:extLst>
+                  </p:cNvPr>
+                  <p:cNvCxnSpPr>
+                    <a:cxnSpLocks/>
+                  </p:cNvCxnSpPr>
+                  <p:nvPr/>
+                </p:nvCxnSpPr>
+                <p:spPr>
+                  <a:xfrm flipH="1" flipV="1">
+                    <a:off x="2057519" y="3320715"/>
+                    <a:ext cx="1349602" cy="6514"/>
+                  </a:xfrm>
+                  <a:prstGeom prst="line">
+                    <a:avLst/>
+                  </a:prstGeom>
+                  <a:ln>
+                    <a:solidFill>
+                      <a:srgbClr val="F0A47D"/>
+                    </a:solidFill>
+                  </a:ln>
+                </p:spPr>
+                <p:style>
+                  <a:lnRef idx="2">
+                    <a:schemeClr val="accent1"/>
+                  </a:lnRef>
+                  <a:fillRef idx="0">
+                    <a:schemeClr val="accent1"/>
+                  </a:fillRef>
+                  <a:effectRef idx="1">
+                    <a:schemeClr val="accent1"/>
+                  </a:effectRef>
+                  <a:fontRef idx="minor">
+                    <a:schemeClr val="tx1"/>
+                  </a:fontRef>
+                </p:style>
+              </p:cxnSp>
+              <p:cxnSp>
+                <p:nvCxnSpPr>
+                  <p:cNvPr id="24" name="直接连接符 23">
+                    <a:extLst>
+                      <a:ext uri="{FF2B5EF4-FFF2-40B4-BE49-F238E27FC236}">
+                        <a16:creationId xmlns:a16="http://schemas.microsoft.com/office/drawing/2014/main" id="{AE77CA45-F60F-666E-31A8-A7878539F372}"/>
+                      </a:ext>
+                    </a:extLst>
+                  </p:cNvPr>
+                  <p:cNvCxnSpPr>
+                    <a:cxnSpLocks/>
+                  </p:cNvCxnSpPr>
+                  <p:nvPr/>
+                </p:nvCxnSpPr>
+                <p:spPr>
+                  <a:xfrm flipH="1" flipV="1">
+                    <a:off x="2104612" y="2520058"/>
+                    <a:ext cx="1349602" cy="6514"/>
+                  </a:xfrm>
+                  <a:prstGeom prst="line">
+                    <a:avLst/>
+                  </a:prstGeom>
+                  <a:ln>
+                    <a:solidFill>
+                      <a:srgbClr val="F0A47D"/>
+                    </a:solidFill>
+                  </a:ln>
+                </p:spPr>
+                <p:style>
+                  <a:lnRef idx="2">
+                    <a:schemeClr val="accent1"/>
+                  </a:lnRef>
+                  <a:fillRef idx="0">
+                    <a:schemeClr val="accent1"/>
+                  </a:fillRef>
+                  <a:effectRef idx="1">
+                    <a:schemeClr val="accent1"/>
+                  </a:effectRef>
+                  <a:fontRef idx="minor">
+                    <a:schemeClr val="tx1"/>
+                  </a:fontRef>
+                </p:style>
+              </p:cxnSp>
+              <p:sp>
+                <p:nvSpPr>
+                  <p:cNvPr id="25" name="矩形 24">
+                    <a:extLst>
+                      <a:ext uri="{FF2B5EF4-FFF2-40B4-BE49-F238E27FC236}">
+                        <a16:creationId xmlns:a16="http://schemas.microsoft.com/office/drawing/2014/main" id="{A59BABEE-86DC-155A-1AB4-D72D23D7FF48}"/>
+                      </a:ext>
+                    </a:extLst>
+                  </p:cNvPr>
+                  <p:cNvSpPr/>
+                  <p:nvPr/>
+                </p:nvSpPr>
+                <p:spPr>
+                  <a:xfrm>
+                    <a:off x="1531505" y="2217961"/>
+                    <a:ext cx="557582" cy="1419446"/>
+                  </a:xfrm>
+                  <a:prstGeom prst="rect">
+                    <a:avLst/>
+                  </a:prstGeom>
+                  <a:solidFill>
+                    <a:srgbClr val="00B0F0"/>
+                  </a:solidFill>
+                </p:spPr>
+                <p:style>
+                  <a:lnRef idx="2">
+                    <a:schemeClr val="accent1">
+                      <a:shade val="15000"/>
+                    </a:schemeClr>
+                  </a:lnRef>
+                  <a:fillRef idx="1">
+                    <a:schemeClr val="accent1"/>
+                  </a:fillRef>
+                  <a:effectRef idx="0">
+                    <a:schemeClr val="accent1"/>
+                  </a:effectRef>
+                  <a:fontRef idx="minor">
+                    <a:schemeClr val="lt1"/>
+                  </a:fontRef>
+                </p:style>
+                <p:txBody>
+                  <a:bodyPr rtlCol="0" anchor="ctr"/>
+                  <a:lstStyle/>
+                  <a:p>
+                    <a:pPr algn="ctr"/>
+                    <a:endParaRPr lang="zh-CN" altLang="en-US"/>
+                  </a:p>
+                </p:txBody>
+              </p:sp>
+              <p:sp>
+                <p:nvSpPr>
+                  <p:cNvPr id="26" name="文本框 25">
+                    <a:extLst>
+                      <a:ext uri="{FF2B5EF4-FFF2-40B4-BE49-F238E27FC236}">
+                        <a16:creationId xmlns:a16="http://schemas.microsoft.com/office/drawing/2014/main" id="{3E652389-EAF3-92FE-B3C4-E0776DE8EE8A}"/>
+                      </a:ext>
+                    </a:extLst>
+                  </p:cNvPr>
+                  <p:cNvSpPr txBox="1"/>
+                  <p:nvPr/>
+                </p:nvSpPr>
+                <p:spPr>
+                  <a:xfrm>
+                    <a:off x="1603095" y="2537966"/>
+                    <a:ext cx="424740" cy="646331"/>
+                  </a:xfrm>
+                  <a:prstGeom prst="rect">
+                    <a:avLst/>
+                  </a:prstGeom>
+                  <a:noFill/>
+                </p:spPr>
+                <p:txBody>
+                  <a:bodyPr wrap="square" rtlCol="0">
+                    <a:spAutoFit/>
+                  </a:bodyPr>
+                  <a:lstStyle/>
+                  <a:p>
+                    <a:r>
+                      <a:rPr lang="zh-CN" altLang="en-US" dirty="0"/>
+                      <a:t>天线</a:t>
+                    </a:r>
+                  </a:p>
+                </p:txBody>
+              </p:sp>
+            </p:grpSp>
+            <p:sp>
+              <p:nvSpPr>
+                <p:cNvPr id="30" name="文本框 29">
+                  <a:extLst>
+                    <a:ext uri="{FF2B5EF4-FFF2-40B4-BE49-F238E27FC236}">
+                      <a16:creationId xmlns:a16="http://schemas.microsoft.com/office/drawing/2014/main" id="{16F4624F-613C-07B1-4E85-B788DB14176E}"/>
+                    </a:ext>
+                  </a:extLst>
+                </p:cNvPr>
+                <p:cNvSpPr txBox="1"/>
+                <p:nvPr/>
+              </p:nvSpPr>
+              <p:spPr>
+                <a:xfrm>
+                  <a:off x="2647407" y="2422878"/>
+                  <a:ext cx="1007235" cy="369332"/>
+                </a:xfrm>
+                <a:prstGeom prst="rect">
+                  <a:avLst/>
+                </a:prstGeom>
+                <a:noFill/>
+              </p:spPr>
+              <p:txBody>
+                <a:bodyPr wrap="square" rtlCol="0">
+                  <a:spAutoFit/>
+                </a:bodyPr>
+                <a:lstStyle/>
+                <a:p>
+                  <a:r>
+                    <a:rPr lang="en-US" altLang="zh-CN" dirty="0"/>
+                    <a:t>zoom1</a:t>
+                  </a:r>
+                  <a:endParaRPr lang="zh-CN" altLang="en-US" dirty="0"/>
+                </a:p>
+              </p:txBody>
+            </p:sp>
+            <p:sp>
+              <p:nvSpPr>
+                <p:cNvPr id="31" name="文本框 30">
+                  <a:extLst>
+                    <a:ext uri="{FF2B5EF4-FFF2-40B4-BE49-F238E27FC236}">
+                      <a16:creationId xmlns:a16="http://schemas.microsoft.com/office/drawing/2014/main" id="{64ADB512-501E-53F3-F5CE-ABC6CDED0C0D}"/>
+                    </a:ext>
+                  </a:extLst>
+                </p:cNvPr>
+                <p:cNvSpPr txBox="1"/>
+                <p:nvPr/>
+              </p:nvSpPr>
+              <p:spPr>
+                <a:xfrm>
+                  <a:off x="3814725" y="2379121"/>
+                  <a:ext cx="1007235" cy="369332"/>
+                </a:xfrm>
+                <a:prstGeom prst="rect">
+                  <a:avLst/>
+                </a:prstGeom>
+                <a:noFill/>
+              </p:spPr>
+              <p:txBody>
+                <a:bodyPr wrap="square" rtlCol="0">
+                  <a:spAutoFit/>
+                </a:bodyPr>
+                <a:lstStyle/>
+                <a:p>
+                  <a:r>
+                    <a:rPr lang="en-US" altLang="zh-CN" dirty="0"/>
+                    <a:t>zoom2</a:t>
+                  </a:r>
+                  <a:endParaRPr lang="zh-CN" altLang="en-US" dirty="0"/>
+                </a:p>
+              </p:txBody>
+            </p:sp>
+            <p:sp>
+              <p:nvSpPr>
+                <p:cNvPr id="32" name="文本框 31">
+                  <a:extLst>
+                    <a:ext uri="{FF2B5EF4-FFF2-40B4-BE49-F238E27FC236}">
+                      <a16:creationId xmlns:a16="http://schemas.microsoft.com/office/drawing/2014/main" id="{C8976B4E-2804-CA20-4CFC-120EEFA06A1E}"/>
+                    </a:ext>
+                  </a:extLst>
+                </p:cNvPr>
+                <p:cNvSpPr txBox="1"/>
+                <p:nvPr/>
+              </p:nvSpPr>
+              <p:spPr>
+                <a:xfrm>
+                  <a:off x="7370041" y="2413468"/>
+                  <a:ext cx="1195647" cy="369332"/>
+                </a:xfrm>
+                <a:prstGeom prst="rect">
+                  <a:avLst/>
+                </a:prstGeom>
+                <a:noFill/>
+              </p:spPr>
+              <p:txBody>
+                <a:bodyPr wrap="square" rtlCol="0">
+                  <a:spAutoFit/>
+                </a:bodyPr>
+                <a:lstStyle/>
+                <a:p>
+                  <a:r>
+                    <a:rPr lang="en-US" altLang="zh-CN" dirty="0"/>
+                    <a:t>First lens</a:t>
+                  </a:r>
+                  <a:endParaRPr lang="zh-CN" altLang="en-US" dirty="0"/>
+                </a:p>
+              </p:txBody>
+            </p:sp>
+          </p:grpSp>
+          <p:sp>
+            <p:nvSpPr>
+              <p:cNvPr id="10" name="矩形 9">
+                <a:extLst>
+                  <a:ext uri="{FF2B5EF4-FFF2-40B4-BE49-F238E27FC236}">
+                    <a16:creationId xmlns:a16="http://schemas.microsoft.com/office/drawing/2014/main" id="{FA36CF01-BBB9-4E8A-BE8B-436B3145A442}"/>
+                  </a:ext>
+                </a:extLst>
+              </p:cNvPr>
+              <p:cNvSpPr/>
+              <p:nvPr/>
+            </p:nvSpPr>
+            <p:spPr>
+              <a:xfrm>
+                <a:off x="10082463" y="2422878"/>
+                <a:ext cx="946484" cy="258850"/>
+              </a:xfrm>
+              <a:prstGeom prst="rect">
+                <a:avLst/>
+              </a:prstGeom>
+              <a:solidFill>
+                <a:schemeClr val="bg1"/>
+              </a:solidFill>
+              <a:ln>
+                <a:noFill/>
+              </a:ln>
+            </p:spPr>
+            <p:style>
+              <a:lnRef idx="2">
+                <a:schemeClr val="accent1">
+                  <a:shade val="15000"/>
+                </a:schemeClr>
+              </a:lnRef>
+              <a:fillRef idx="1">
+                <a:schemeClr val="accent1"/>
+              </a:fillRef>
+              <a:effectRef idx="0">
+                <a:schemeClr val="accent1"/>
+              </a:effectRef>
+              <a:fontRef idx="minor">
+                <a:schemeClr val="lt1"/>
+              </a:fontRef>
+            </p:style>
+            <p:txBody>
+              <a:bodyPr rtlCol="0" anchor="ctr"/>
+              <a:lstStyle/>
+              <a:p>
+                <a:pPr algn="ctr"/>
+                <a:endParaRPr lang="zh-CN" altLang="en-US"/>
+              </a:p>
+            </p:txBody>
+          </p:sp>
+        </p:grpSp>
+        <p:grpSp>
+          <p:nvGrpSpPr>
+            <p:cNvPr id="36" name="组合 35">
+              <a:extLst>
+                <a:ext uri="{FF2B5EF4-FFF2-40B4-BE49-F238E27FC236}">
+                  <a16:creationId xmlns:a16="http://schemas.microsoft.com/office/drawing/2014/main" id="{065FDF0E-928C-5B22-53FA-E20A2D145DBC}"/>
+                </a:ext>
+              </a:extLst>
+            </p:cNvPr>
+            <p:cNvGrpSpPr/>
+            <p:nvPr/>
+          </p:nvGrpSpPr>
+          <p:grpSpPr>
+            <a:xfrm>
+              <a:off x="1647022" y="2379121"/>
+              <a:ext cx="6208294" cy="1198268"/>
+              <a:chOff x="1647022" y="2379121"/>
+              <a:chExt cx="6208294" cy="1198268"/>
+            </a:xfrm>
+          </p:grpSpPr>
+          <p:cxnSp>
+            <p:nvCxnSpPr>
+              <p:cNvPr id="23" name="直接箭头连接符 22">
+                <a:extLst>
+                  <a:ext uri="{FF2B5EF4-FFF2-40B4-BE49-F238E27FC236}">
+                    <a16:creationId xmlns:a16="http://schemas.microsoft.com/office/drawing/2014/main" id="{E226FBA4-DF5A-4765-43E4-D12D181ECA8F}"/>
+                  </a:ext>
+                </a:extLst>
+              </p:cNvPr>
+              <p:cNvCxnSpPr>
+                <a:cxnSpLocks/>
+              </p:cNvCxnSpPr>
+              <p:nvPr/>
+            </p:nvCxnSpPr>
+            <p:spPr>
+              <a:xfrm flipV="1">
+                <a:off x="1662547" y="3204269"/>
+                <a:ext cx="6166000" cy="4152"/>
+              </a:xfrm>
+              <a:prstGeom prst="straightConnector1">
+                <a:avLst/>
+              </a:prstGeom>
+              <a:ln>
+                <a:solidFill>
+                  <a:schemeClr val="tx1"/>
+                </a:solidFill>
+                <a:headEnd type="triangle"/>
+                <a:tailEnd type="triangle"/>
+              </a:ln>
+            </p:spPr>
+            <p:style>
+              <a:lnRef idx="2">
+                <a:schemeClr val="accent1"/>
+              </a:lnRef>
+              <a:fillRef idx="0">
+                <a:schemeClr val="accent1"/>
+              </a:fillRef>
+              <a:effectRef idx="1">
+                <a:schemeClr val="accent1"/>
+              </a:effectRef>
+              <a:fontRef idx="minor">
+                <a:schemeClr val="tx1"/>
+              </a:fontRef>
+            </p:style>
+          </p:cxnSp>
+          <p:cxnSp>
+            <p:nvCxnSpPr>
+              <p:cNvPr id="34" name="直接连接符 33">
+                <a:extLst>
+                  <a:ext uri="{FF2B5EF4-FFF2-40B4-BE49-F238E27FC236}">
+                    <a16:creationId xmlns:a16="http://schemas.microsoft.com/office/drawing/2014/main" id="{783E6086-90C5-A194-CCD2-CC39B436716B}"/>
+                  </a:ext>
+                </a:extLst>
+              </p:cNvPr>
+              <p:cNvCxnSpPr/>
+              <p:nvPr/>
+            </p:nvCxnSpPr>
+            <p:spPr>
+              <a:xfrm>
+                <a:off x="1647022" y="2413468"/>
+                <a:ext cx="0" cy="1163921"/>
+              </a:xfrm>
+              <a:prstGeom prst="line">
+                <a:avLst/>
+              </a:prstGeom>
+              <a:ln>
+                <a:solidFill>
+                  <a:schemeClr val="tx1"/>
+                </a:solidFill>
+              </a:ln>
+            </p:spPr>
+            <p:style>
+              <a:lnRef idx="2">
+                <a:schemeClr val="accent1"/>
+              </a:lnRef>
+              <a:fillRef idx="0">
+                <a:schemeClr val="accent1"/>
+              </a:fillRef>
+              <a:effectRef idx="1">
+                <a:schemeClr val="accent1"/>
+              </a:effectRef>
+              <a:fontRef idx="minor">
+                <a:schemeClr val="tx1"/>
+              </a:fontRef>
+            </p:style>
+          </p:cxnSp>
+          <p:cxnSp>
+            <p:nvCxnSpPr>
+              <p:cNvPr id="35" name="直接连接符 34">
+                <a:extLst>
+                  <a:ext uri="{FF2B5EF4-FFF2-40B4-BE49-F238E27FC236}">
+                    <a16:creationId xmlns:a16="http://schemas.microsoft.com/office/drawing/2014/main" id="{BD3F4BEA-0908-0D3F-1C22-E30F38D704D0}"/>
+                  </a:ext>
+                </a:extLst>
+              </p:cNvPr>
+              <p:cNvCxnSpPr/>
+              <p:nvPr/>
+            </p:nvCxnSpPr>
+            <p:spPr>
+              <a:xfrm>
+                <a:off x="7855316" y="2379121"/>
+                <a:ext cx="0" cy="1163921"/>
+              </a:xfrm>
+              <a:prstGeom prst="line">
+                <a:avLst/>
+              </a:prstGeom>
+              <a:ln>
+                <a:solidFill>
+                  <a:schemeClr val="tx1"/>
+                </a:solidFill>
+              </a:ln>
+            </p:spPr>
+            <p:style>
+              <a:lnRef idx="2">
+                <a:schemeClr val="accent1"/>
+              </a:lnRef>
+              <a:fillRef idx="0">
+                <a:schemeClr val="accent1"/>
+              </a:fillRef>
+              <a:effectRef idx="1">
+                <a:schemeClr val="accent1"/>
+              </a:effectRef>
+              <a:fontRef idx="minor">
+                <a:schemeClr val="tx1"/>
+              </a:fontRef>
+            </p:style>
+          </p:cxnSp>
+        </p:grpSp>
+        <p:sp>
+          <p:nvSpPr>
+            <p:cNvPr id="37" name="文本框 36">
+              <a:extLst>
+                <a:ext uri="{FF2B5EF4-FFF2-40B4-BE49-F238E27FC236}">
+                  <a16:creationId xmlns:a16="http://schemas.microsoft.com/office/drawing/2014/main" id="{95357DA6-8FB8-5913-C3F0-41E3FE24DA3B}"/>
+                </a:ext>
+              </a:extLst>
+            </p:cNvPr>
+            <p:cNvSpPr txBox="1"/>
+            <p:nvPr/>
+          </p:nvSpPr>
+          <p:spPr>
+            <a:xfrm>
+              <a:off x="4164887" y="3181731"/>
+              <a:ext cx="1314145" cy="369332"/>
+            </a:xfrm>
+            <a:prstGeom prst="rect">
+              <a:avLst/>
+            </a:prstGeom>
+            <a:noFill/>
+          </p:spPr>
+          <p:txBody>
+            <a:bodyPr wrap="square" rtlCol="0">
+              <a:spAutoFit/>
+            </a:bodyPr>
+            <a:lstStyle/>
+            <a:p>
+              <a:r>
+                <a:rPr lang="en-US" altLang="zh-CN" dirty="0"/>
+                <a:t>L= 4.590 m</a:t>
+              </a:r>
+              <a:endParaRPr lang="zh-CN" altLang="en-US" dirty="0"/>
+            </a:p>
+          </p:txBody>
+        </p:sp>
+        <p:cxnSp>
+          <p:nvCxnSpPr>
+            <p:cNvPr id="39" name="直接箭头连接符 38">
+              <a:extLst>
+                <a:ext uri="{FF2B5EF4-FFF2-40B4-BE49-F238E27FC236}">
+                  <a16:creationId xmlns:a16="http://schemas.microsoft.com/office/drawing/2014/main" id="{7587760C-1FB4-A59E-DF8B-EF301501725E}"/>
+                </a:ext>
+              </a:extLst>
+            </p:cNvPr>
+            <p:cNvCxnSpPr/>
+            <p:nvPr/>
+          </p:nvCxnSpPr>
+          <p:spPr>
+            <a:xfrm>
+              <a:off x="1662547" y="990740"/>
+              <a:ext cx="1349602" cy="0"/>
+            </a:xfrm>
+            <a:prstGeom prst="straightConnector1">
+              <a:avLst/>
+            </a:prstGeom>
+            <a:ln>
+              <a:solidFill>
+                <a:schemeClr val="tx1"/>
+              </a:solidFill>
+              <a:headEnd type="triangle"/>
+              <a:tailEnd type="triangle"/>
+            </a:ln>
+          </p:spPr>
+          <p:style>
+            <a:lnRef idx="2">
+              <a:schemeClr val="accent1"/>
+            </a:lnRef>
+            <a:fillRef idx="0">
+              <a:schemeClr val="accent1"/>
+            </a:fillRef>
+            <a:effectRef idx="1">
+              <a:schemeClr val="accent1"/>
+            </a:effectRef>
+            <a:fontRef idx="minor">
+              <a:schemeClr val="tx1"/>
+            </a:fontRef>
+          </p:style>
+        </p:cxnSp>
+        <p:cxnSp>
+          <p:nvCxnSpPr>
+            <p:cNvPr id="41" name="直接连接符 40">
+              <a:extLst>
+                <a:ext uri="{FF2B5EF4-FFF2-40B4-BE49-F238E27FC236}">
+                  <a16:creationId xmlns:a16="http://schemas.microsoft.com/office/drawing/2014/main" id="{5058F0D8-798A-C36D-5BEF-0ED3BEF56DCB}"/>
+                </a:ext>
+              </a:extLst>
+            </p:cNvPr>
+            <p:cNvCxnSpPr>
+              <a:cxnSpLocks/>
+            </p:cNvCxnSpPr>
+            <p:nvPr/>
+          </p:nvCxnSpPr>
+          <p:spPr>
+            <a:xfrm>
+              <a:off x="3061309" y="602812"/>
+              <a:ext cx="0" cy="604356"/>
+            </a:xfrm>
+            <a:prstGeom prst="line">
+              <a:avLst/>
+            </a:prstGeom>
+            <a:ln>
+              <a:solidFill>
+                <a:schemeClr val="tx1"/>
+              </a:solidFill>
+            </a:ln>
+          </p:spPr>
+          <p:style>
+            <a:lnRef idx="2">
+              <a:schemeClr val="accent1"/>
+            </a:lnRef>
+            <a:fillRef idx="0">
+              <a:schemeClr val="accent1"/>
+            </a:fillRef>
+            <a:effectRef idx="1">
+              <a:schemeClr val="accent1"/>
+            </a:effectRef>
+            <a:fontRef idx="minor">
+              <a:schemeClr val="tx1"/>
+            </a:fontRef>
+          </p:style>
+        </p:cxnSp>
+        <p:cxnSp>
+          <p:nvCxnSpPr>
+            <p:cNvPr id="43" name="直接连接符 42">
+              <a:extLst>
+                <a:ext uri="{FF2B5EF4-FFF2-40B4-BE49-F238E27FC236}">
+                  <a16:creationId xmlns:a16="http://schemas.microsoft.com/office/drawing/2014/main" id="{013D4C71-65A4-6385-A288-40E6789978AB}"/>
+                </a:ext>
+              </a:extLst>
+            </p:cNvPr>
+            <p:cNvCxnSpPr>
+              <a:cxnSpLocks/>
+            </p:cNvCxnSpPr>
+            <p:nvPr/>
+          </p:nvCxnSpPr>
+          <p:spPr>
+            <a:xfrm>
+              <a:off x="1644289" y="679152"/>
+              <a:ext cx="0" cy="604356"/>
+            </a:xfrm>
+            <a:prstGeom prst="line">
+              <a:avLst/>
+            </a:prstGeom>
+            <a:ln>
+              <a:solidFill>
+                <a:schemeClr val="tx1"/>
+              </a:solidFill>
+            </a:ln>
+          </p:spPr>
+          <p:style>
+            <a:lnRef idx="2">
+              <a:schemeClr val="accent1"/>
+            </a:lnRef>
+            <a:fillRef idx="0">
+              <a:schemeClr val="accent1"/>
+            </a:fillRef>
+            <a:effectRef idx="1">
+              <a:schemeClr val="accent1"/>
+            </a:effectRef>
+            <a:fontRef idx="minor">
+              <a:schemeClr val="tx1"/>
+            </a:fontRef>
+          </p:style>
+        </p:cxnSp>
+        <p:sp>
+          <p:nvSpPr>
+            <p:cNvPr id="44" name="文本框 43">
+              <a:extLst>
+                <a:ext uri="{FF2B5EF4-FFF2-40B4-BE49-F238E27FC236}">
+                  <a16:creationId xmlns:a16="http://schemas.microsoft.com/office/drawing/2014/main" id="{A1CC8F05-5B18-7F9F-D0A2-17B4EA5E5DFE}"/>
+                </a:ext>
+              </a:extLst>
+            </p:cNvPr>
+            <p:cNvSpPr txBox="1"/>
+            <p:nvPr/>
+          </p:nvSpPr>
+          <p:spPr>
+            <a:xfrm>
+              <a:off x="1834551" y="664099"/>
+              <a:ext cx="1315449" cy="276999"/>
+            </a:xfrm>
+            <a:prstGeom prst="rect">
+              <a:avLst/>
+            </a:prstGeom>
+            <a:noFill/>
+          </p:spPr>
+          <p:txBody>
+            <a:bodyPr wrap="square" rtlCol="0">
+              <a:spAutoFit/>
+            </a:bodyPr>
+            <a:lstStyle/>
+            <a:p>
+              <a:r>
+                <a:rPr lang="en-US" altLang="zh-CN" sz="1200" dirty="0"/>
+                <a:t>d_antenna</a:t>
+              </a:r>
+              <a:endParaRPr lang="zh-CN" altLang="en-US" sz="1200" dirty="0"/>
+            </a:p>
+          </p:txBody>
+        </p:sp>
+        <p:cxnSp>
+          <p:nvCxnSpPr>
+            <p:cNvPr id="45" name="直接连接符 44">
+              <a:extLst>
+                <a:ext uri="{FF2B5EF4-FFF2-40B4-BE49-F238E27FC236}">
+                  <a16:creationId xmlns:a16="http://schemas.microsoft.com/office/drawing/2014/main" id="{022F375A-AFCD-63F3-6686-B86C78879D3E}"/>
+                </a:ext>
+              </a:extLst>
+            </p:cNvPr>
+            <p:cNvCxnSpPr>
+              <a:cxnSpLocks/>
+            </p:cNvCxnSpPr>
+            <p:nvPr/>
+          </p:nvCxnSpPr>
+          <p:spPr>
+            <a:xfrm>
+              <a:off x="4232856" y="594791"/>
+              <a:ext cx="0" cy="604356"/>
+            </a:xfrm>
+            <a:prstGeom prst="line">
+              <a:avLst/>
+            </a:prstGeom>
+            <a:ln>
+              <a:solidFill>
+                <a:schemeClr val="tx1"/>
+              </a:solidFill>
+            </a:ln>
+          </p:spPr>
+          <p:style>
+            <a:lnRef idx="2">
+              <a:schemeClr val="accent1"/>
+            </a:lnRef>
+            <a:fillRef idx="0">
+              <a:schemeClr val="accent1"/>
+            </a:fillRef>
+            <a:effectRef idx="1">
+              <a:schemeClr val="accent1"/>
+            </a:effectRef>
+            <a:fontRef idx="minor">
+              <a:schemeClr val="tx1"/>
+            </a:fontRef>
+          </p:style>
+        </p:cxnSp>
+        <p:cxnSp>
+          <p:nvCxnSpPr>
+            <p:cNvPr id="46" name="直接箭头连接符 45">
+              <a:extLst>
+                <a:ext uri="{FF2B5EF4-FFF2-40B4-BE49-F238E27FC236}">
+                  <a16:creationId xmlns:a16="http://schemas.microsoft.com/office/drawing/2014/main" id="{440FD488-8701-6923-A5A2-CDD95C3694A3}"/>
+                </a:ext>
+              </a:extLst>
+            </p:cNvPr>
+            <p:cNvCxnSpPr>
+              <a:cxnSpLocks/>
+            </p:cNvCxnSpPr>
+            <p:nvPr/>
+          </p:nvCxnSpPr>
+          <p:spPr>
+            <a:xfrm>
+              <a:off x="3090985" y="997372"/>
+              <a:ext cx="1075296" cy="0"/>
+            </a:xfrm>
+            <a:prstGeom prst="straightConnector1">
+              <a:avLst/>
+            </a:prstGeom>
+            <a:ln>
+              <a:solidFill>
+                <a:schemeClr val="tx1"/>
+              </a:solidFill>
+              <a:headEnd type="triangle"/>
+              <a:tailEnd type="triangle"/>
+            </a:ln>
+          </p:spPr>
+          <p:style>
+            <a:lnRef idx="2">
+              <a:schemeClr val="accent1"/>
+            </a:lnRef>
+            <a:fillRef idx="0">
+              <a:schemeClr val="accent1"/>
+            </a:fillRef>
+            <a:effectRef idx="1">
+              <a:schemeClr val="accent1"/>
+            </a:effectRef>
+            <a:fontRef idx="minor">
+              <a:schemeClr val="tx1"/>
+            </a:fontRef>
+          </p:style>
+        </p:cxnSp>
+        <p:sp>
+          <p:nvSpPr>
+            <p:cNvPr id="48" name="文本框 47">
+              <a:extLst>
+                <a:ext uri="{FF2B5EF4-FFF2-40B4-BE49-F238E27FC236}">
+                  <a16:creationId xmlns:a16="http://schemas.microsoft.com/office/drawing/2014/main" id="{3F7E23E5-4B5A-933D-9B24-C0619E2B7AA5}"/>
+                </a:ext>
+              </a:extLst>
+            </p:cNvPr>
+            <p:cNvSpPr txBox="1"/>
+            <p:nvPr/>
+          </p:nvSpPr>
+          <p:spPr>
+            <a:xfrm>
+              <a:off x="2999436" y="649077"/>
+              <a:ext cx="2153334" cy="276999"/>
+            </a:xfrm>
+            <a:prstGeom prst="rect">
+              <a:avLst/>
+            </a:prstGeom>
+            <a:noFill/>
+          </p:spPr>
+          <p:txBody>
+            <a:bodyPr wrap="square" rtlCol="0">
+              <a:spAutoFit/>
+            </a:bodyPr>
+            <a:lstStyle/>
+            <a:p>
+              <a:r>
+                <a:rPr lang="en-US" altLang="zh-CN" sz="1200" dirty="0"/>
+                <a:t>d_zoom1_zoom2</a:t>
+              </a:r>
+              <a:endParaRPr lang="zh-CN" altLang="en-US" sz="1200" dirty="0"/>
+            </a:p>
+          </p:txBody>
+        </p:sp>
+      </p:grpSp>
+    </p:spTree>
+    <p:extLst>
+      <p:ext uri="{BB962C8B-B14F-4D97-AF65-F5344CB8AC3E}">
+        <p14:creationId xmlns:p14="http://schemas.microsoft.com/office/powerpoint/2010/main" val="3481569148"/>
+      </p:ext>
+    </p:extLst>
+  </p:cSld>
+  <p:clrMapOvr>
+    <a:masterClrMapping/>
+  </p:clrMapOvr>
+</p:sld>
+</file>
+
+<file path=ppt/slides/slide5.xml><?xml version="1.0" encoding="utf-8"?>
+<p:sld xmlns:a="http://schemas.openxmlformats.org/drawingml/2006/main" xmlns:r="http://schemas.openxmlformats.org/officeDocument/2006/relationships" xmlns:p="http://schemas.openxmlformats.org/presentationml/2006/main">
+  <p:cSld>
+    <p:spTree>
+      <p:nvGrpSpPr>
+        <p:cNvPr id="1" name=""/>
+        <p:cNvGrpSpPr/>
+        <p:nvPr/>
+      </p:nvGrpSpPr>
+      <p:grpSpPr>
+        <a:xfrm>
+          <a:off x="0" y="0"/>
+          <a:ext cx="0" cy="0"/>
+          <a:chOff x="0" y="0"/>
+          <a:chExt cx="0" cy="0"/>
+        </a:xfrm>
+      </p:grpSpPr>
+      <p:grpSp>
+        <p:nvGrpSpPr>
+          <p:cNvPr id="14" name="组合 13">
+            <a:extLst>
+              <a:ext uri="{FF2B5EF4-FFF2-40B4-BE49-F238E27FC236}">
+                <a16:creationId xmlns:a16="http://schemas.microsoft.com/office/drawing/2014/main" id="{FC08843C-99CF-BDF2-C49E-6E6FC9504504}"/>
+              </a:ext>
+            </a:extLst>
+          </p:cNvPr>
+          <p:cNvGrpSpPr/>
+          <p:nvPr/>
+        </p:nvGrpSpPr>
+        <p:grpSpPr>
+          <a:xfrm>
+            <a:off x="591089" y="389741"/>
+            <a:ext cx="4911936" cy="4963655"/>
+            <a:chOff x="3234537" y="1179450"/>
+            <a:chExt cx="4911936" cy="4963655"/>
+          </a:xfrm>
+        </p:grpSpPr>
+        <p:pic>
+          <p:nvPicPr>
+            <p:cNvPr id="3" name="图片 2">
+              <a:extLst>
+                <a:ext uri="{FF2B5EF4-FFF2-40B4-BE49-F238E27FC236}">
+                  <a16:creationId xmlns:a16="http://schemas.microsoft.com/office/drawing/2014/main" id="{93A0586E-B710-F5E3-95BA-6BF641549469}"/>
+                </a:ext>
+              </a:extLst>
+            </p:cNvPr>
+            <p:cNvPicPr>
+              <a:picLocks noChangeAspect="1"/>
+            </p:cNvPicPr>
+            <p:nvPr/>
+          </p:nvPicPr>
+          <p:blipFill>
+            <a:blip r:embed="rId2"/>
+            <a:stretch>
+              <a:fillRect/>
+            </a:stretch>
+          </p:blipFill>
+          <p:spPr>
+            <a:xfrm>
+              <a:off x="3373821" y="1179450"/>
+              <a:ext cx="4080929" cy="1146731"/>
+            </a:xfrm>
+            <a:prstGeom prst="rect">
+              <a:avLst/>
+            </a:prstGeom>
+          </p:spPr>
+        </p:pic>
+        <p:pic>
+          <p:nvPicPr>
+            <p:cNvPr id="5" name="图片 4">
+              <a:extLst>
+                <a:ext uri="{FF2B5EF4-FFF2-40B4-BE49-F238E27FC236}">
+                  <a16:creationId xmlns:a16="http://schemas.microsoft.com/office/drawing/2014/main" id="{9D1090CA-748A-2A43-B5F1-0905B107E02B}"/>
+                </a:ext>
+              </a:extLst>
+            </p:cNvPr>
+            <p:cNvPicPr>
+              <a:picLocks noChangeAspect="1"/>
+            </p:cNvPicPr>
+            <p:nvPr/>
+          </p:nvPicPr>
+          <p:blipFill>
+            <a:blip r:embed="rId3"/>
+            <a:stretch>
+              <a:fillRect/>
+            </a:stretch>
+          </p:blipFill>
+          <p:spPr>
+            <a:xfrm>
+              <a:off x="3234537" y="2650469"/>
+              <a:ext cx="4632112" cy="3361448"/>
+            </a:xfrm>
+            <a:prstGeom prst="rect">
+              <a:avLst/>
+            </a:prstGeom>
+          </p:spPr>
+        </p:pic>
+        <p:sp>
+          <p:nvSpPr>
+            <p:cNvPr id="6" name="矩形 5">
+              <a:extLst>
+                <a:ext uri="{FF2B5EF4-FFF2-40B4-BE49-F238E27FC236}">
+                  <a16:creationId xmlns:a16="http://schemas.microsoft.com/office/drawing/2014/main" id="{D2A7FEAF-7394-DACB-091C-A1FDB0E6873C}"/>
+                </a:ext>
+              </a:extLst>
+            </p:cNvPr>
+            <p:cNvSpPr/>
+            <p:nvPr/>
+          </p:nvSpPr>
+          <p:spPr>
+            <a:xfrm>
+              <a:off x="6304581" y="1317159"/>
+              <a:ext cx="944117" cy="871311"/>
+            </a:xfrm>
+            <a:prstGeom prst="rect">
+              <a:avLst/>
+            </a:prstGeom>
+            <a:noFill/>
+          </p:spPr>
+          <p:style>
+            <a:lnRef idx="2">
+              <a:schemeClr val="accent1">
+                <a:shade val="15000"/>
+              </a:schemeClr>
+            </a:lnRef>
+            <a:fillRef idx="1">
+              <a:schemeClr val="accent1"/>
+            </a:fillRef>
+            <a:effectRef idx="0">
+              <a:schemeClr val="accent1"/>
+            </a:effectRef>
+            <a:fontRef idx="minor">
+              <a:schemeClr val="lt1"/>
+            </a:fontRef>
+          </p:style>
+          <p:txBody>
+            <a:bodyPr rtlCol="0" anchor="ctr"/>
+            <a:lstStyle/>
+            <a:p>
+              <a:pPr algn="ctr"/>
+              <a:endParaRPr lang="zh-CN" altLang="en-US"/>
+            </a:p>
+          </p:txBody>
+        </p:sp>
+        <p:cxnSp>
+          <p:nvCxnSpPr>
+            <p:cNvPr id="8" name="直接箭头连接符 7">
+              <a:extLst>
+                <a:ext uri="{FF2B5EF4-FFF2-40B4-BE49-F238E27FC236}">
+                  <a16:creationId xmlns:a16="http://schemas.microsoft.com/office/drawing/2014/main" id="{BE60C645-E6D3-6FA2-29CE-07051C31C720}"/>
+                </a:ext>
+              </a:extLst>
+            </p:cNvPr>
+            <p:cNvCxnSpPr/>
+            <p:nvPr/>
+          </p:nvCxnSpPr>
+          <p:spPr>
+            <a:xfrm flipH="1">
+              <a:off x="3433156" y="2188470"/>
+              <a:ext cx="2871425" cy="720985"/>
+            </a:xfrm>
+            <a:prstGeom prst="straightConnector1">
+              <a:avLst/>
+            </a:prstGeom>
+            <a:ln>
+              <a:solidFill>
+                <a:schemeClr val="tx1"/>
+              </a:solidFill>
+              <a:tailEnd type="triangle"/>
+            </a:ln>
+          </p:spPr>
+          <p:style>
+            <a:lnRef idx="2">
+              <a:schemeClr val="accent1"/>
+            </a:lnRef>
+            <a:fillRef idx="0">
+              <a:schemeClr val="accent1"/>
+            </a:fillRef>
+            <a:effectRef idx="1">
+              <a:schemeClr val="accent1"/>
+            </a:effectRef>
+            <a:fontRef idx="minor">
+              <a:schemeClr val="tx1"/>
+            </a:fontRef>
+          </p:style>
+        </p:cxnSp>
+        <p:cxnSp>
+          <p:nvCxnSpPr>
+            <p:cNvPr id="9" name="直接箭头连接符 8">
+              <a:extLst>
+                <a:ext uri="{FF2B5EF4-FFF2-40B4-BE49-F238E27FC236}">
+                  <a16:creationId xmlns:a16="http://schemas.microsoft.com/office/drawing/2014/main" id="{1E29280D-B67D-DD7A-C7C6-06E240C7BD48}"/>
+                </a:ext>
+              </a:extLst>
+            </p:cNvPr>
+            <p:cNvCxnSpPr>
+              <a:cxnSpLocks/>
+            </p:cNvCxnSpPr>
+            <p:nvPr/>
+          </p:nvCxnSpPr>
+          <p:spPr>
+            <a:xfrm>
+              <a:off x="7248698" y="2195215"/>
+              <a:ext cx="897775" cy="720985"/>
+            </a:xfrm>
+            <a:prstGeom prst="straightConnector1">
+              <a:avLst/>
+            </a:prstGeom>
+            <a:ln>
+              <a:solidFill>
+                <a:schemeClr val="tx1"/>
+              </a:solidFill>
+              <a:tailEnd type="triangle"/>
+            </a:ln>
+          </p:spPr>
+          <p:style>
+            <a:lnRef idx="2">
+              <a:schemeClr val="accent1"/>
+            </a:lnRef>
+            <a:fillRef idx="0">
+              <a:schemeClr val="accent1"/>
+            </a:fillRef>
+            <a:effectRef idx="1">
+              <a:schemeClr val="accent1"/>
+            </a:effectRef>
+            <a:fontRef idx="minor">
+              <a:schemeClr val="tx1"/>
+            </a:fontRef>
+          </p:style>
+        </p:cxnSp>
+        <p:sp>
+          <p:nvSpPr>
+            <p:cNvPr id="12" name="矩形 11">
+              <a:extLst>
+                <a:ext uri="{FF2B5EF4-FFF2-40B4-BE49-F238E27FC236}">
+                  <a16:creationId xmlns:a16="http://schemas.microsoft.com/office/drawing/2014/main" id="{8B9B1FE3-E6D8-4A68-4BC5-B145B9890E5B}"/>
+                </a:ext>
+              </a:extLst>
+            </p:cNvPr>
+            <p:cNvSpPr/>
+            <p:nvPr/>
+          </p:nvSpPr>
+          <p:spPr>
+            <a:xfrm>
+              <a:off x="3234537" y="2909455"/>
+              <a:ext cx="4911936" cy="3233650"/>
+            </a:xfrm>
+            <a:prstGeom prst="rect">
+              <a:avLst/>
+            </a:prstGeom>
+            <a:noFill/>
+            <a:ln>
+              <a:solidFill>
+                <a:schemeClr val="tx1"/>
+              </a:solidFill>
+            </a:ln>
+          </p:spPr>
+          <p:style>
+            <a:lnRef idx="2">
+              <a:schemeClr val="accent1">
+                <a:shade val="15000"/>
+              </a:schemeClr>
+            </a:lnRef>
+            <a:fillRef idx="1">
+              <a:schemeClr val="accent1"/>
+            </a:fillRef>
+            <a:effectRef idx="0">
+              <a:schemeClr val="accent1"/>
+            </a:effectRef>
+            <a:fontRef idx="minor">
+              <a:schemeClr val="lt1"/>
+            </a:fontRef>
+          </p:style>
+          <p:txBody>
+            <a:bodyPr rtlCol="0" anchor="ctr"/>
+            <a:lstStyle/>
+            <a:p>
+              <a:pPr algn="ctr"/>
+              <a:endParaRPr lang="zh-CN" altLang="en-US"/>
+            </a:p>
+          </p:txBody>
+        </p:sp>
+      </p:grpSp>
+    </p:spTree>
+    <p:extLst>
+      <p:ext uri="{BB962C8B-B14F-4D97-AF65-F5344CB8AC3E}">
+        <p14:creationId xmlns:p14="http://schemas.microsoft.com/office/powerpoint/2010/main" val="814612174"/>
+      </p:ext>
+    </p:extLst>
+  </p:cSld>
+  <p:clrMapOvr>
+    <a:masterClrMapping/>
+  </p:clrMapOvr>
+</p:sld>
+</file>
+
+<file path=ppt/slides/slide6.xml><?xml version="1.0" encoding="utf-8"?>
+<p:sld xmlns:a="http://schemas.openxmlformats.org/drawingml/2006/main" xmlns:r="http://schemas.openxmlformats.org/officeDocument/2006/relationships" xmlns:p="http://schemas.openxmlformats.org/presentationml/2006/main">
+  <p:cSld>
+    <p:spTree>
+      <p:nvGrpSpPr>
+        <p:cNvPr id="1" name=""/>
+        <p:cNvGrpSpPr/>
+        <p:nvPr/>
+      </p:nvGrpSpPr>
+      <p:grpSpPr>
+        <a:xfrm>
+          <a:off x="0" y="0"/>
+          <a:ext cx="0" cy="0"/>
+          <a:chOff x="0" y="0"/>
+          <a:chExt cx="0" cy="0"/>
+        </a:xfrm>
+      </p:grpSpPr>
+      <p:grpSp>
+        <p:nvGrpSpPr>
+          <p:cNvPr id="6" name="组合 5">
+            <a:extLst>
+              <a:ext uri="{FF2B5EF4-FFF2-40B4-BE49-F238E27FC236}">
+                <a16:creationId xmlns:a16="http://schemas.microsoft.com/office/drawing/2014/main" id="{8E61F535-4644-27A3-FA49-ED780F51A371}"/>
+              </a:ext>
+            </a:extLst>
+          </p:cNvPr>
+          <p:cNvGrpSpPr/>
+          <p:nvPr/>
+        </p:nvGrpSpPr>
+        <p:grpSpPr>
+          <a:xfrm>
+            <a:off x="2150009" y="618805"/>
+            <a:ext cx="4999153" cy="4974767"/>
+            <a:chOff x="2150009" y="618805"/>
+            <a:chExt cx="4999153" cy="4974767"/>
+          </a:xfrm>
+        </p:grpSpPr>
+        <p:pic>
+          <p:nvPicPr>
+            <p:cNvPr id="3" name="图片 2">
+              <a:extLst>
+                <a:ext uri="{FF2B5EF4-FFF2-40B4-BE49-F238E27FC236}">
+                  <a16:creationId xmlns:a16="http://schemas.microsoft.com/office/drawing/2014/main" id="{E61D8D25-1FC7-ACFE-6429-561257E1A309}"/>
+                </a:ext>
+              </a:extLst>
+            </p:cNvPr>
+            <p:cNvPicPr>
+              <a:picLocks noChangeAspect="1"/>
+            </p:cNvPicPr>
+            <p:nvPr/>
+          </p:nvPicPr>
+          <p:blipFill>
+            <a:blip r:embed="rId2"/>
+            <a:stretch>
+              <a:fillRect/>
+            </a:stretch>
+          </p:blipFill>
+          <p:spPr>
+            <a:xfrm>
+              <a:off x="2150009" y="618805"/>
+              <a:ext cx="4999153" cy="4974767"/>
+            </a:xfrm>
+            <a:prstGeom prst="rect">
+              <a:avLst/>
+            </a:prstGeom>
+          </p:spPr>
+        </p:pic>
+        <p:sp>
+          <p:nvSpPr>
+            <p:cNvPr id="4" name="文本框 3">
+              <a:extLst>
+                <a:ext uri="{FF2B5EF4-FFF2-40B4-BE49-F238E27FC236}">
+                  <a16:creationId xmlns:a16="http://schemas.microsoft.com/office/drawing/2014/main" id="{DC566321-166E-74C5-1F68-E1A6BAC7580B}"/>
+                </a:ext>
+              </a:extLst>
+            </p:cNvPr>
+            <p:cNvSpPr txBox="1"/>
+            <p:nvPr/>
+          </p:nvSpPr>
+          <p:spPr>
+            <a:xfrm>
+              <a:off x="5327181" y="4876800"/>
+              <a:ext cx="1537638" cy="369332"/>
+            </a:xfrm>
+            <a:prstGeom prst="rect">
+              <a:avLst/>
+            </a:prstGeom>
+            <a:noFill/>
+          </p:spPr>
+          <p:txBody>
+            <a:bodyPr wrap="square" rtlCol="0">
+              <a:spAutoFit/>
+            </a:bodyPr>
+            <a:lstStyle/>
+            <a:p>
+              <a:r>
+                <a:rPr lang="en-US" altLang="zh-CN" dirty="0"/>
+                <a:t>Cutoff layer</a:t>
+              </a:r>
+              <a:endParaRPr lang="zh-CN" altLang="en-US" dirty="0"/>
+            </a:p>
+          </p:txBody>
+        </p:sp>
+        <p:sp>
+          <p:nvSpPr>
+            <p:cNvPr id="5" name="文本框 4">
+              <a:extLst>
+                <a:ext uri="{FF2B5EF4-FFF2-40B4-BE49-F238E27FC236}">
+                  <a16:creationId xmlns:a16="http://schemas.microsoft.com/office/drawing/2014/main" id="{B10948DF-531C-1A3D-E126-A2C0DFEF0997}"/>
+                </a:ext>
+              </a:extLst>
+            </p:cNvPr>
+            <p:cNvSpPr txBox="1"/>
+            <p:nvPr/>
+          </p:nvSpPr>
+          <p:spPr>
+            <a:xfrm>
+              <a:off x="2360977" y="4876800"/>
+              <a:ext cx="1537638" cy="369332"/>
+            </a:xfrm>
+            <a:prstGeom prst="rect">
+              <a:avLst/>
+            </a:prstGeom>
+            <a:noFill/>
+          </p:spPr>
+          <p:txBody>
+            <a:bodyPr wrap="square" rtlCol="0">
+              <a:spAutoFit/>
+            </a:bodyPr>
+            <a:lstStyle/>
+            <a:p>
+              <a:r>
+                <a:rPr lang="en-US" altLang="zh-CN" dirty="0"/>
+                <a:t>Window</a:t>
+              </a:r>
+              <a:endParaRPr lang="zh-CN" altLang="en-US" dirty="0"/>
+            </a:p>
+          </p:txBody>
+        </p:sp>
+      </p:grpSp>
+    </p:spTree>
+    <p:extLst>
+      <p:ext uri="{BB962C8B-B14F-4D97-AF65-F5344CB8AC3E}">
+        <p14:creationId xmlns:p14="http://schemas.microsoft.com/office/powerpoint/2010/main" val="4083513714"/>
+      </p:ext>
+    </p:extLst>
+  </p:cSld>
+  <p:clrMapOvr>
+    <a:masterClrMapping/>
+  </p:clrMapOvr>
+</p:sld>
+</file>
+
+<file path=ppt/slides/slide7.xml><?xml version="1.0" encoding="utf-8"?>
+<p:sld xmlns:a="http://schemas.openxmlformats.org/drawingml/2006/main" xmlns:r="http://schemas.openxmlformats.org/officeDocument/2006/relationships" xmlns:p="http://schemas.openxmlformats.org/presentationml/2006/main">
+  <p:cSld>
+    <p:spTree>
+      <p:nvGrpSpPr>
+        <p:cNvPr id="1" name=""/>
+        <p:cNvGrpSpPr/>
+        <p:nvPr/>
+      </p:nvGrpSpPr>
+      <p:grpSpPr>
+        <a:xfrm>
+          <a:off x="0" y="0"/>
+          <a:ext cx="0" cy="0"/>
+          <a:chOff x="0" y="0"/>
+          <a:chExt cx="0" cy="0"/>
+        </a:xfrm>
+      </p:grpSpPr>
+      <p:grpSp>
+        <p:nvGrpSpPr>
+          <p:cNvPr id="32" name="组合 31">
+            <a:extLst>
+              <a:ext uri="{FF2B5EF4-FFF2-40B4-BE49-F238E27FC236}">
+                <a16:creationId xmlns:a16="http://schemas.microsoft.com/office/drawing/2014/main" id="{C5969FDB-C709-FE63-7EAD-742C76F7D543}"/>
+              </a:ext>
+            </a:extLst>
+          </p:cNvPr>
+          <p:cNvGrpSpPr/>
+          <p:nvPr/>
+        </p:nvGrpSpPr>
+        <p:grpSpPr>
+          <a:xfrm>
+            <a:off x="533742" y="330848"/>
+            <a:ext cx="7214151" cy="5468123"/>
+            <a:chOff x="394594" y="658840"/>
+            <a:chExt cx="7214151" cy="5468123"/>
+          </a:xfrm>
+        </p:grpSpPr>
+        <p:grpSp>
+          <p:nvGrpSpPr>
+            <p:cNvPr id="11" name="组合 10">
+              <a:extLst>
+                <a:ext uri="{FF2B5EF4-FFF2-40B4-BE49-F238E27FC236}">
+                  <a16:creationId xmlns:a16="http://schemas.microsoft.com/office/drawing/2014/main" id="{63CC7143-4D29-7997-3D76-EA799A925D31}"/>
+                </a:ext>
+              </a:extLst>
+            </p:cNvPr>
+            <p:cNvGrpSpPr/>
+            <p:nvPr/>
+          </p:nvGrpSpPr>
+          <p:grpSpPr>
+            <a:xfrm>
+              <a:off x="394594" y="658840"/>
+              <a:ext cx="7214151" cy="5468123"/>
+              <a:chOff x="1101176" y="642215"/>
+              <a:chExt cx="7214151" cy="5468123"/>
+            </a:xfrm>
+          </p:grpSpPr>
+          <p:grpSp>
+            <p:nvGrpSpPr>
+              <p:cNvPr id="6" name="组合 5">
+                <a:extLst>
+                  <a:ext uri="{FF2B5EF4-FFF2-40B4-BE49-F238E27FC236}">
+                    <a16:creationId xmlns:a16="http://schemas.microsoft.com/office/drawing/2014/main" id="{9033A642-40CE-2A95-FE66-050023B5778F}"/>
+                  </a:ext>
+                </a:extLst>
+              </p:cNvPr>
+              <p:cNvGrpSpPr/>
+              <p:nvPr/>
+            </p:nvGrpSpPr>
+            <p:grpSpPr>
+              <a:xfrm>
+                <a:off x="1101176" y="642215"/>
+                <a:ext cx="7214151" cy="5468123"/>
+                <a:chOff x="1832696" y="908222"/>
+                <a:chExt cx="7214151" cy="5468123"/>
+              </a:xfrm>
+            </p:grpSpPr>
+            <p:pic>
+              <p:nvPicPr>
+                <p:cNvPr id="3" name="图片 2">
+                  <a:extLst>
+                    <a:ext uri="{FF2B5EF4-FFF2-40B4-BE49-F238E27FC236}">
+                      <a16:creationId xmlns:a16="http://schemas.microsoft.com/office/drawing/2014/main" id="{7E0091AA-2F19-143E-12A1-EAF2C47646A0}"/>
+                    </a:ext>
+                  </a:extLst>
+                </p:cNvPr>
+                <p:cNvPicPr>
+                  <a:picLocks noChangeAspect="1"/>
+                </p:cNvPicPr>
+                <p:nvPr/>
+              </p:nvPicPr>
+              <p:blipFill>
+                <a:blip r:embed="rId2"/>
+                <a:stretch>
+                  <a:fillRect/>
+                </a:stretch>
+              </p:blipFill>
+              <p:spPr>
+                <a:xfrm>
+                  <a:off x="1832696" y="908222"/>
+                  <a:ext cx="3693160" cy="2770160"/>
+                </a:xfrm>
+                <a:prstGeom prst="rect">
+                  <a:avLst/>
+                </a:prstGeom>
+              </p:spPr>
+            </p:pic>
+            <p:pic>
+              <p:nvPicPr>
+                <p:cNvPr id="2" name="图片 1">
+                  <a:extLst>
+                    <a:ext uri="{FF2B5EF4-FFF2-40B4-BE49-F238E27FC236}">
+                      <a16:creationId xmlns:a16="http://schemas.microsoft.com/office/drawing/2014/main" id="{6A78B002-A2C6-CBA0-DB43-7393CD4810DE}"/>
+                    </a:ext>
+                  </a:extLst>
+                </p:cNvPr>
+                <p:cNvPicPr>
+                  <a:picLocks noChangeAspect="1"/>
+                </p:cNvPicPr>
+                <p:nvPr/>
+              </p:nvPicPr>
+              <p:blipFill>
+                <a:blip r:embed="rId3"/>
+                <a:stretch>
+                  <a:fillRect/>
+                </a:stretch>
+              </p:blipFill>
+              <p:spPr>
+                <a:xfrm>
+                  <a:off x="5322773" y="946702"/>
+                  <a:ext cx="3693160" cy="2769870"/>
+                </a:xfrm>
+                <a:prstGeom prst="rect">
+                  <a:avLst/>
+                </a:prstGeom>
+              </p:spPr>
+            </p:pic>
+            <p:pic>
+              <p:nvPicPr>
+                <p:cNvPr id="4" name="图片 3">
+                  <a:extLst>
+                    <a:ext uri="{FF2B5EF4-FFF2-40B4-BE49-F238E27FC236}">
+                      <a16:creationId xmlns:a16="http://schemas.microsoft.com/office/drawing/2014/main" id="{B88E62E1-E2B2-09AB-7CFC-0601B25ED996}"/>
+                    </a:ext>
+                  </a:extLst>
+                </p:cNvPr>
+                <p:cNvPicPr>
+                  <a:picLocks noChangeAspect="1"/>
+                </p:cNvPicPr>
+                <p:nvPr/>
+              </p:nvPicPr>
+              <p:blipFill>
+                <a:blip r:embed="rId4"/>
+                <a:stretch>
+                  <a:fillRect/>
+                </a:stretch>
+              </p:blipFill>
+              <p:spPr>
+                <a:xfrm>
+                  <a:off x="1838729" y="3558713"/>
+                  <a:ext cx="3681095" cy="2760980"/>
+                </a:xfrm>
+                <a:prstGeom prst="rect">
+                  <a:avLst/>
+                </a:prstGeom>
+              </p:spPr>
+            </p:pic>
+            <p:pic>
+              <p:nvPicPr>
+                <p:cNvPr id="5" name="图片 4">
+                  <a:extLst>
+                    <a:ext uri="{FF2B5EF4-FFF2-40B4-BE49-F238E27FC236}">
+                      <a16:creationId xmlns:a16="http://schemas.microsoft.com/office/drawing/2014/main" id="{578D093A-7F4C-5A15-70EA-2BF22FCC66B6}"/>
+                    </a:ext>
+                  </a:extLst>
+                </p:cNvPr>
+                <p:cNvPicPr>
+                  <a:picLocks noChangeAspect="1"/>
+                </p:cNvPicPr>
+                <p:nvPr/>
+              </p:nvPicPr>
+              <p:blipFill>
+                <a:blip r:embed="rId5"/>
+                <a:stretch>
+                  <a:fillRect/>
+                </a:stretch>
+              </p:blipFill>
+              <p:spPr>
+                <a:xfrm>
+                  <a:off x="5289610" y="3558713"/>
+                  <a:ext cx="3757237" cy="2817632"/>
+                </a:xfrm>
+                <a:prstGeom prst="rect">
+                  <a:avLst/>
+                </a:prstGeom>
+              </p:spPr>
+            </p:pic>
+          </p:grpSp>
+          <p:sp>
+            <p:nvSpPr>
+              <p:cNvPr id="7" name="文本框 6">
+                <a:extLst>
+                  <a:ext uri="{FF2B5EF4-FFF2-40B4-BE49-F238E27FC236}">
+                    <a16:creationId xmlns:a16="http://schemas.microsoft.com/office/drawing/2014/main" id="{D48EA498-7DE2-D70F-134D-0E13E7886252}"/>
+                  </a:ext>
+                </a:extLst>
+              </p:cNvPr>
+              <p:cNvSpPr txBox="1"/>
+              <p:nvPr/>
+            </p:nvSpPr>
+            <p:spPr>
+              <a:xfrm>
+                <a:off x="4088808" y="935857"/>
+                <a:ext cx="523702" cy="369332"/>
+              </a:xfrm>
+              <a:prstGeom prst="rect">
+                <a:avLst/>
+              </a:prstGeom>
+              <a:noFill/>
+            </p:spPr>
+            <p:txBody>
+              <a:bodyPr wrap="square" rtlCol="0">
+                <a:spAutoFit/>
+              </a:bodyPr>
+              <a:lstStyle/>
+              <a:p>
+                <a:r>
+                  <a:rPr lang="en-US" altLang="zh-CN" dirty="0"/>
+                  <a:t>(a)</a:t>
+                </a:r>
+                <a:endParaRPr lang="zh-CN" altLang="en-US" dirty="0"/>
+              </a:p>
+            </p:txBody>
+          </p:sp>
+          <p:sp>
+            <p:nvSpPr>
+              <p:cNvPr id="8" name="文本框 7">
+                <a:extLst>
+                  <a:ext uri="{FF2B5EF4-FFF2-40B4-BE49-F238E27FC236}">
+                    <a16:creationId xmlns:a16="http://schemas.microsoft.com/office/drawing/2014/main" id="{A97A3E8E-904D-1CB0-9A75-5A9E731DF6E6}"/>
+                  </a:ext>
+                </a:extLst>
+              </p:cNvPr>
+              <p:cNvSpPr txBox="1"/>
+              <p:nvPr/>
+            </p:nvSpPr>
+            <p:spPr>
+              <a:xfrm>
+                <a:off x="4954385" y="935857"/>
+                <a:ext cx="523702" cy="369332"/>
+              </a:xfrm>
+              <a:prstGeom prst="rect">
+                <a:avLst/>
+              </a:prstGeom>
+              <a:noFill/>
+            </p:spPr>
+            <p:txBody>
+              <a:bodyPr wrap="square" rtlCol="0">
+                <a:spAutoFit/>
+              </a:bodyPr>
+              <a:lstStyle/>
+              <a:p>
+                <a:r>
+                  <a:rPr lang="en-US" altLang="zh-CN" dirty="0"/>
+                  <a:t>(b)</a:t>
+                </a:r>
+                <a:endParaRPr lang="zh-CN" altLang="en-US" dirty="0"/>
+              </a:p>
+            </p:txBody>
+          </p:sp>
+          <p:sp>
+            <p:nvSpPr>
+              <p:cNvPr id="9" name="文本框 8">
+                <a:extLst>
+                  <a:ext uri="{FF2B5EF4-FFF2-40B4-BE49-F238E27FC236}">
+                    <a16:creationId xmlns:a16="http://schemas.microsoft.com/office/drawing/2014/main" id="{FC4A3BB5-5A9C-6725-9522-73406A462F0D}"/>
+                  </a:ext>
+                </a:extLst>
+              </p:cNvPr>
+              <p:cNvSpPr txBox="1"/>
+              <p:nvPr/>
+            </p:nvSpPr>
+            <p:spPr>
+              <a:xfrm>
+                <a:off x="4085792" y="3559541"/>
+                <a:ext cx="523702" cy="369332"/>
+              </a:xfrm>
+              <a:prstGeom prst="rect">
+                <a:avLst/>
+              </a:prstGeom>
+              <a:noFill/>
+            </p:spPr>
+            <p:txBody>
+              <a:bodyPr wrap="square" rtlCol="0">
+                <a:spAutoFit/>
+              </a:bodyPr>
+              <a:lstStyle/>
+              <a:p>
+                <a:r>
+                  <a:rPr lang="en-US" altLang="zh-CN" dirty="0"/>
+                  <a:t>(c)</a:t>
+                </a:r>
+                <a:endParaRPr lang="zh-CN" altLang="en-US" dirty="0"/>
+              </a:p>
+            </p:txBody>
+          </p:sp>
+          <p:sp>
+            <p:nvSpPr>
+              <p:cNvPr id="10" name="文本框 9">
+                <a:extLst>
+                  <a:ext uri="{FF2B5EF4-FFF2-40B4-BE49-F238E27FC236}">
+                    <a16:creationId xmlns:a16="http://schemas.microsoft.com/office/drawing/2014/main" id="{392ADEF7-2AA1-E4E7-FE8A-EC469694AC39}"/>
+                  </a:ext>
+                </a:extLst>
+              </p:cNvPr>
+              <p:cNvSpPr txBox="1"/>
+              <p:nvPr/>
+            </p:nvSpPr>
+            <p:spPr>
+              <a:xfrm>
+                <a:off x="4954385" y="3608423"/>
+                <a:ext cx="523702" cy="369332"/>
+              </a:xfrm>
+              <a:prstGeom prst="rect">
+                <a:avLst/>
+              </a:prstGeom>
+              <a:noFill/>
+            </p:spPr>
+            <p:txBody>
+              <a:bodyPr wrap="square" rtlCol="0">
+                <a:spAutoFit/>
+              </a:bodyPr>
+              <a:lstStyle/>
+              <a:p>
+                <a:r>
+                  <a:rPr lang="en-US" altLang="zh-CN" dirty="0"/>
+                  <a:t>(d)</a:t>
+                </a:r>
+                <a:endParaRPr lang="zh-CN" altLang="en-US" dirty="0"/>
+              </a:p>
+            </p:txBody>
+          </p:sp>
+        </p:grpSp>
+        <p:sp>
+          <p:nvSpPr>
+            <p:cNvPr id="29" name="矩形 28">
+              <a:extLst>
+                <a:ext uri="{FF2B5EF4-FFF2-40B4-BE49-F238E27FC236}">
+                  <a16:creationId xmlns:a16="http://schemas.microsoft.com/office/drawing/2014/main" id="{1CA5C6AA-1E19-08B4-6D7F-9EBC17995454}"/>
+                </a:ext>
+              </a:extLst>
+            </p:cNvPr>
+            <p:cNvSpPr/>
+            <p:nvPr/>
+          </p:nvSpPr>
+          <p:spPr>
+            <a:xfrm>
+              <a:off x="2316445" y="952482"/>
+              <a:ext cx="1402144" cy="4808238"/>
+            </a:xfrm>
+            <a:prstGeom prst="rect">
+              <a:avLst/>
+            </a:prstGeom>
+            <a:solidFill>
+              <a:srgbClr val="FFC000">
+                <a:alpha val="14000"/>
+              </a:srgbClr>
+            </a:solidFill>
+            <a:ln>
+              <a:noFill/>
+            </a:ln>
+          </p:spPr>
+          <p:style>
+            <a:lnRef idx="2">
+              <a:schemeClr val="accent1">
+                <a:shade val="15000"/>
+              </a:schemeClr>
+            </a:lnRef>
+            <a:fillRef idx="1">
+              <a:schemeClr val="accent1"/>
+            </a:fillRef>
+            <a:effectRef idx="0">
+              <a:schemeClr val="accent1"/>
+            </a:effectRef>
+            <a:fontRef idx="minor">
+              <a:schemeClr val="lt1"/>
+            </a:fontRef>
+          </p:style>
+          <p:txBody>
+            <a:bodyPr rtlCol="0" anchor="ctr"/>
+            <a:lstStyle/>
+            <a:p>
+              <a:pPr algn="ctr"/>
+              <a:endParaRPr lang="zh-CN" altLang="en-US"/>
+            </a:p>
+          </p:txBody>
+        </p:sp>
+        <p:sp>
+          <p:nvSpPr>
+            <p:cNvPr id="31" name="矩形 30">
+              <a:extLst>
+                <a:ext uri="{FF2B5EF4-FFF2-40B4-BE49-F238E27FC236}">
+                  <a16:creationId xmlns:a16="http://schemas.microsoft.com/office/drawing/2014/main" id="{1F814E76-5A97-7532-774E-E6CEA8ED2D9B}"/>
+                </a:ext>
+              </a:extLst>
+            </p:cNvPr>
+            <p:cNvSpPr/>
+            <p:nvPr/>
+          </p:nvSpPr>
+          <p:spPr>
+            <a:xfrm>
+              <a:off x="5834270" y="1024881"/>
+              <a:ext cx="1420910" cy="4808238"/>
+            </a:xfrm>
+            <a:prstGeom prst="rect">
+              <a:avLst/>
+            </a:prstGeom>
+            <a:solidFill>
+              <a:srgbClr val="FFC000">
+                <a:alpha val="14000"/>
+              </a:srgbClr>
+            </a:solidFill>
+            <a:ln>
+              <a:noFill/>
+            </a:ln>
+          </p:spPr>
+          <p:style>
+            <a:lnRef idx="2">
+              <a:schemeClr val="accent1">
+                <a:shade val="15000"/>
+              </a:schemeClr>
+            </a:lnRef>
+            <a:fillRef idx="1">
+              <a:schemeClr val="accent1"/>
+            </a:fillRef>
+            <a:effectRef idx="0">
+              <a:schemeClr val="accent1"/>
+            </a:effectRef>
+            <a:fontRef idx="minor">
+              <a:schemeClr val="lt1"/>
+            </a:fontRef>
+          </p:style>
+          <p:txBody>
+            <a:bodyPr rtlCol="0" anchor="ctr"/>
+            <a:lstStyle/>
+            <a:p>
+              <a:pPr algn="ctr"/>
+              <a:endParaRPr lang="zh-CN" altLang="en-US"/>
+            </a:p>
+          </p:txBody>
+        </p:sp>
+      </p:grpSp>
+    </p:spTree>
+    <p:extLst>
+      <p:ext uri="{BB962C8B-B14F-4D97-AF65-F5344CB8AC3E}">
+        <p14:creationId xmlns:p14="http://schemas.microsoft.com/office/powerpoint/2010/main" val="394496613"/>
+      </p:ext>
+    </p:extLst>
+  </p:cSld>
+  <p:clrMapOvr>
+    <a:masterClrMapping/>
+  </p:clrMapOvr>
+</p:sld>
+</file>
+
 <file path=ppt/theme/theme1.xml><?xml version="1.0" encoding="utf-8"?>
 <a:theme xmlns:a="http://schemas.openxmlformats.org/drawingml/2006/main" name="Office Theme">
   <a:themeElements>
@@ -4900,20 +7734,20 @@
 </file>
 
 <file path=customXml/item2.xml><?xml version="1.0" encoding="utf-8"?>
+<p:properties xmlns:p="http://schemas.microsoft.com/office/2006/metadata/properties" xmlns:xsi="http://www.w3.org/2001/XMLSchema-instance" xmlns:pc="http://schemas.microsoft.com/office/infopath/2007/PartnerControls">
+  <documentManagement>
+    <_activity xmlns="17936081-4bf9-4132-8c7b-98c75d1b63f5" xsi:nil="true"/>
+  </documentManagement>
+</p:properties>
+</file>
+
+<file path=customXml/item3.xml><?xml version="1.0" encoding="utf-8"?>
 <?mso-contentType ?>
 <FormTemplates xmlns="http://schemas.microsoft.com/sharepoint/v3/contenttype/forms">
   <Display>DocumentLibraryForm</Display>
   <Edit>DocumentLibraryForm</Edit>
   <New>DocumentLibraryForm</New>
 </FormTemplates>
-</file>
-
-<file path=customXml/item3.xml><?xml version="1.0" encoding="utf-8"?>
-<p:properties xmlns:p="http://schemas.microsoft.com/office/2006/metadata/properties" xmlns:xsi="http://www.w3.org/2001/XMLSchema-instance" xmlns:pc="http://schemas.microsoft.com/office/infopath/2007/PartnerControls">
-  <documentManagement>
-    <_activity xmlns="17936081-4bf9-4132-8c7b-98c75d1b63f5" xsi:nil="true"/>
-  </documentManagement>
-</p:properties>
 </file>
 
 <file path=customXml/itemProps1.xml><?xml version="1.0" encoding="utf-8"?>
@@ -4936,14 +7770,6 @@
 </file>
 
 <file path=customXml/itemProps2.xml><?xml version="1.0" encoding="utf-8"?>
-<ds:datastoreItem xmlns:ds="http://schemas.openxmlformats.org/officeDocument/2006/customXml" ds:itemID="{229EB416-5A04-431A-8C52-EEABD40DE597}">
-  <ds:schemaRefs>
-    <ds:schemaRef ds:uri="http://schemas.microsoft.com/sharepoint/v3/contenttype/forms"/>
-  </ds:schemaRefs>
-</ds:datastoreItem>
-</file>
-
-<file path=customXml/itemProps3.xml><?xml version="1.0" encoding="utf-8"?>
 <ds:datastoreItem xmlns:ds="http://schemas.openxmlformats.org/officeDocument/2006/customXml" ds:itemID="{EC31E3A2-3A0A-4D47-961D-786587E1974D}">
   <ds:schemaRefs>
     <ds:schemaRef ds:uri="http://purl.org/dc/dcmitype/"/>
@@ -4958,4 +7784,12 @@
     <ds:schemaRef ds:uri="http://purl.org/dc/terms/"/>
   </ds:schemaRefs>
 </ds:datastoreItem>
+</file>
+
+<file path=customXml/itemProps3.xml><?xml version="1.0" encoding="utf-8"?>
+<ds:datastoreItem xmlns:ds="http://schemas.openxmlformats.org/officeDocument/2006/customXml" ds:itemID="{229EB416-5A04-431A-8C52-EEABD40DE597}">
+  <ds:schemaRefs>
+    <ds:schemaRef ds:uri="http://schemas.microsoft.com/sharepoint/v3/contenttype/forms"/>
+  </ds:schemaRefs>
+</ds:datastoreItem>
 </file>